--- a/Шумов В УП01/Шумов В Презентация.pptx
+++ b/Шумов В УП01/Шумов В Презентация.pptx
@@ -5,10 +5,10 @@
     <p:sldMasterId id="2147483648" r:id="rId1"/>
   </p:sldMasterIdLst>
   <p:notesMasterIdLst>
-    <p:notesMasterId r:id="rId14"/>
+    <p:notesMasterId r:id="rId15"/>
   </p:notesMasterIdLst>
   <p:handoutMasterIdLst>
-    <p:handoutMasterId r:id="rId15"/>
+    <p:handoutMasterId r:id="rId16"/>
   </p:handoutMasterIdLst>
   <p:sldIdLst>
     <p:sldId id="256" r:id="rId3"/>
@@ -16,12 +16,13 @@
     <p:sldId id="261" r:id="rId5"/>
     <p:sldId id="263" r:id="rId6"/>
     <p:sldId id="262" r:id="rId7"/>
-    <p:sldId id="264" r:id="rId8"/>
-    <p:sldId id="265" r:id="rId9"/>
-    <p:sldId id="266" r:id="rId10"/>
-    <p:sldId id="267" r:id="rId11"/>
-    <p:sldId id="268" r:id="rId12"/>
-    <p:sldId id="269" r:id="rId13"/>
+    <p:sldId id="270" r:id="rId8"/>
+    <p:sldId id="264" r:id="rId9"/>
+    <p:sldId id="265" r:id="rId10"/>
+    <p:sldId id="266" r:id="rId11"/>
+    <p:sldId id="267" r:id="rId12"/>
+    <p:sldId id="268" r:id="rId13"/>
+    <p:sldId id="269" r:id="rId14"/>
   </p:sldIdLst>
   <p:sldSz cx="12192000" cy="6858000"/>
   <p:notesSz cx="7103745" cy="10234295"/>
@@ -128,7 +129,7 @@
             <a:srgbClr val="A4A3A4"/>
           </p15:clr>
         </p15:guide>
-        <p15:guide id="2" pos="3843" userDrawn="1">
+        <p15:guide id="2" pos="3840" userDrawn="1">
           <p15:clr>
             <a:srgbClr val="A4A3A4"/>
           </p15:clr>
@@ -3984,6 +3985,51 @@
         <p:nvPr/>
       </p:nvGrpSpPr>
       <p:grpSpPr/>
+      <p:cxnSp>
+        <p:nvCxnSpPr>
+          <p:cNvPr id="7" name="Прямое соединение 6"/>
+          <p:cNvCxnSpPr/>
+          <p:nvPr/>
+        </p:nvCxnSpPr>
+        <p:spPr>
+          <a:xfrm flipH="1">
+            <a:off x="6057265" y="935990"/>
+            <a:ext cx="635" cy="5953125"/>
+          </a:xfrm>
+          <a:prstGeom prst="line">
+            <a:avLst/>
+          </a:prstGeom>
+          <a:ln w="31750">
+            <a:gradFill>
+              <a:gsLst>
+                <a:gs pos="0">
+                  <a:schemeClr val="accent1">
+                    <a:hueOff val="-4200000"/>
+                  </a:schemeClr>
+                </a:gs>
+                <a:gs pos="100000">
+                  <a:schemeClr val="accent1"/>
+                </a:gs>
+              </a:gsLst>
+              <a:lin ang="21120000"/>
+            </a:gradFill>
+          </a:ln>
+        </p:spPr>
+        <p:style>
+          <a:lnRef idx="0">
+            <a:srgbClr val="FFFFFF"/>
+          </a:lnRef>
+          <a:fillRef idx="0">
+            <a:srgbClr val="FFFFFF"/>
+          </a:fillRef>
+          <a:effectRef idx="0">
+            <a:srgbClr val="FFFFFF"/>
+          </a:effectRef>
+          <a:fontRef idx="minor">
+            <a:schemeClr val="tx1"/>
+          </a:fontRef>
+        </p:style>
+      </p:cxnSp>
       <p:sp>
         <p:nvSpPr>
           <p:cNvPr id="6" name="Скругленный прямоугольник 5"/>
@@ -4046,6 +4092,1118 @@
                 <a:cs typeface="Cascadia Code" panose="020B0609020000020004" charset="0"/>
                 <a:sym typeface="+mn-ea"/>
               </a:rPr>
+              <a:t>Преимущества и недостатки</a:t>
+            </a:r>
+            <a:endParaRPr lang="ru-RU" sz="2800">
+              <a:solidFill>
+                <a:schemeClr val="tx1"/>
+              </a:solidFill>
+              <a:effectLst/>
+              <a:latin typeface="Cascadia Code" panose="020B0609020000020004" charset="0"/>
+              <a:cs typeface="Cascadia Code" panose="020B0609020000020004" charset="0"/>
+              <a:sym typeface="+mn-ea"/>
+            </a:endParaRPr>
+          </a:p>
+        </p:txBody>
+      </p:sp>
+      <p:sp>
+        <p:nvSpPr>
+          <p:cNvPr id="9" name="Текстовое поле 8"/>
+          <p:cNvSpPr txBox="1"/>
+          <p:nvPr/>
+        </p:nvSpPr>
+        <p:spPr>
+          <a:xfrm>
+            <a:off x="1117600" y="1069340"/>
+            <a:ext cx="3429635" cy="460375"/>
+          </a:xfrm>
+          <a:prstGeom prst="rect">
+            <a:avLst/>
+          </a:prstGeom>
+          <a:noFill/>
+        </p:spPr>
+        <p:txBody>
+          <a:bodyPr wrap="square" rtlCol="0">
+            <a:spAutoFit/>
+          </a:bodyPr>
+          <a:p>
+            <a:pPr algn="ctr"/>
+            <a:r>
+              <a:rPr lang="ru-RU" altLang="ru-RU" sz="2400" b="1">
+                <a:solidFill>
+                  <a:srgbClr val="5BD582"/>
+                </a:solidFill>
+                <a:latin typeface="Cascadia Code" panose="020B0609020000020004" charset="0"/>
+                <a:cs typeface="Cascadia Code" panose="020B0609020000020004" charset="0"/>
+              </a:rPr>
+              <a:t>Преимущества (+)</a:t>
+            </a:r>
+            <a:endParaRPr lang="ru-RU" altLang="ru-RU" sz="2400" b="1">
+              <a:solidFill>
+                <a:srgbClr val="5BD582"/>
+              </a:solidFill>
+              <a:latin typeface="Cascadia Code" panose="020B0609020000020004" charset="0"/>
+              <a:cs typeface="Cascadia Code" panose="020B0609020000020004" charset="0"/>
+            </a:endParaRPr>
+          </a:p>
+        </p:txBody>
+      </p:sp>
+      <p:sp>
+        <p:nvSpPr>
+          <p:cNvPr id="10" name="Текстовое поле 9"/>
+          <p:cNvSpPr txBox="1"/>
+          <p:nvPr/>
+        </p:nvSpPr>
+        <p:spPr>
+          <a:xfrm>
+            <a:off x="7440930" y="1069340"/>
+            <a:ext cx="3429635" cy="460375"/>
+          </a:xfrm>
+          <a:prstGeom prst="rect">
+            <a:avLst/>
+          </a:prstGeom>
+          <a:noFill/>
+        </p:spPr>
+        <p:txBody>
+          <a:bodyPr wrap="square" rtlCol="0">
+            <a:spAutoFit/>
+          </a:bodyPr>
+          <a:p>
+            <a:pPr algn="ctr"/>
+            <a:r>
+              <a:rPr lang="ru-RU" altLang="ru-RU" sz="2400" b="1">
+                <a:solidFill>
+                  <a:srgbClr val="5B9CD5"/>
+                </a:solidFill>
+                <a:latin typeface="Cascadia Code" panose="020B0609020000020004" charset="0"/>
+                <a:cs typeface="Cascadia Code" panose="020B0609020000020004" charset="0"/>
+              </a:rPr>
+              <a:t>Недостатки (-)</a:t>
+            </a:r>
+            <a:endParaRPr lang="ru-RU" altLang="ru-RU" sz="2400" b="1">
+              <a:solidFill>
+                <a:srgbClr val="5B9CD5"/>
+              </a:solidFill>
+              <a:latin typeface="Cascadia Code" panose="020B0609020000020004" charset="0"/>
+              <a:cs typeface="Cascadia Code" panose="020B0609020000020004" charset="0"/>
+            </a:endParaRPr>
+          </a:p>
+        </p:txBody>
+      </p:sp>
+      <p:sp>
+        <p:nvSpPr>
+          <p:cNvPr id="11" name="Текстовое поле 10"/>
+          <p:cNvSpPr txBox="1"/>
+          <p:nvPr/>
+        </p:nvSpPr>
+        <p:spPr>
+          <a:xfrm>
+            <a:off x="99695" y="1899920"/>
+            <a:ext cx="5779770" cy="829945"/>
+          </a:xfrm>
+          <a:prstGeom prst="rect">
+            <a:avLst/>
+          </a:prstGeom>
+          <a:noFill/>
+        </p:spPr>
+        <p:txBody>
+          <a:bodyPr wrap="square" rtlCol="0">
+            <a:spAutoFit/>
+          </a:bodyPr>
+          <a:p>
+            <a:pPr algn="l"/>
+            <a:r>
+              <a:rPr lang="ru-RU" altLang="ru-RU" sz="2400" b="1">
+                <a:solidFill>
+                  <a:srgbClr val="5BD582"/>
+                </a:solidFill>
+                <a:latin typeface="Cascadia Code" panose="020B0609020000020004" charset="0"/>
+                <a:cs typeface="Cascadia Code" panose="020B0609020000020004" charset="0"/>
+              </a:rPr>
+              <a:t>- </a:t>
+            </a:r>
+            <a:r>
+              <a:rPr lang="en-US" altLang="en-US" sz="2400" b="1">
+                <a:solidFill>
+                  <a:srgbClr val="5BD582"/>
+                </a:solidFill>
+                <a:latin typeface="Cascadia Code" panose="020B0609020000020004" charset="0"/>
+                <a:cs typeface="Cascadia Code" panose="020B0609020000020004" charset="0"/>
+              </a:rPr>
+              <a:t>Мультиформатный</a:t>
+            </a:r>
+            <a:r>
+              <a:rPr lang="en-US" altLang="ru-RU" sz="2400" b="1">
+                <a:solidFill>
+                  <a:srgbClr val="5BD582"/>
+                </a:solidFill>
+                <a:latin typeface="Cascadia Code" panose="020B0609020000020004" charset="0"/>
+                <a:cs typeface="Cascadia Code" panose="020B0609020000020004" charset="0"/>
+              </a:rPr>
+              <a:t> </a:t>
+            </a:r>
+            <a:r>
+              <a:rPr lang="en-US" altLang="en-US" sz="2400" b="1">
+                <a:solidFill>
+                  <a:srgbClr val="5BD582"/>
+                </a:solidFill>
+                <a:latin typeface="Cascadia Code" panose="020B0609020000020004" charset="0"/>
+                <a:cs typeface="Cascadia Code" panose="020B0609020000020004" charset="0"/>
+              </a:rPr>
+              <a:t>экспорт</a:t>
+            </a:r>
+            <a:r>
+              <a:rPr lang="en-US" altLang="ru-RU" sz="2400" b="1">
+                <a:solidFill>
+                  <a:srgbClr val="5BD582"/>
+                </a:solidFill>
+                <a:latin typeface="Cascadia Code" panose="020B0609020000020004" charset="0"/>
+                <a:cs typeface="Cascadia Code" panose="020B0609020000020004" charset="0"/>
+              </a:rPr>
+              <a:t> </a:t>
+            </a:r>
+            <a:r>
+              <a:rPr lang="ru-RU" altLang="en-US" sz="2400" b="1">
+                <a:solidFill>
+                  <a:srgbClr val="5BD582"/>
+                </a:solidFill>
+                <a:latin typeface="Cascadia Code" panose="020B0609020000020004" charset="0"/>
+                <a:cs typeface="Cascadia Code" panose="020B0609020000020004" charset="0"/>
+              </a:rPr>
+              <a:t>   </a:t>
+            </a:r>
+            <a:r>
+              <a:rPr lang="en-US" altLang="en-US" sz="2400" b="1">
+                <a:solidFill>
+                  <a:srgbClr val="5BD582"/>
+                </a:solidFill>
+                <a:latin typeface="Cascadia Code" panose="020B0609020000020004" charset="0"/>
+                <a:cs typeface="Cascadia Code" panose="020B0609020000020004" charset="0"/>
+              </a:rPr>
+              <a:t>результатов</a:t>
+            </a:r>
+            <a:r>
+              <a:rPr lang="ru-RU" altLang="en-US" sz="2400" b="1">
+                <a:solidFill>
+                  <a:srgbClr val="5BD582"/>
+                </a:solidFill>
+                <a:latin typeface="Cascadia Code" panose="020B0609020000020004" charset="0"/>
+                <a:cs typeface="Cascadia Code" panose="020B0609020000020004" charset="0"/>
+              </a:rPr>
+              <a:t> </a:t>
+            </a:r>
+            <a:r>
+              <a:rPr lang="en-US" altLang="ru-RU" sz="2400" b="1">
+                <a:solidFill>
+                  <a:srgbClr val="5BD582"/>
+                </a:solidFill>
+                <a:latin typeface="Cascadia Code" panose="020B0609020000020004" charset="0"/>
+                <a:cs typeface="Cascadia Code" panose="020B0609020000020004" charset="0"/>
+              </a:rPr>
+              <a:t>(DOCX, PDF, XLSX)</a:t>
+            </a:r>
+            <a:endParaRPr lang="en-US" altLang="ru-RU" sz="2400" b="1">
+              <a:solidFill>
+                <a:srgbClr val="5BD582"/>
+              </a:solidFill>
+              <a:latin typeface="Cascadia Code" panose="020B0609020000020004" charset="0"/>
+              <a:cs typeface="Cascadia Code" panose="020B0609020000020004" charset="0"/>
+            </a:endParaRPr>
+          </a:p>
+        </p:txBody>
+      </p:sp>
+      <p:sp>
+        <p:nvSpPr>
+          <p:cNvPr id="13" name="Текстовое поле 12"/>
+          <p:cNvSpPr txBox="1"/>
+          <p:nvPr/>
+        </p:nvSpPr>
+        <p:spPr>
+          <a:xfrm>
+            <a:off x="99695" y="2821305"/>
+            <a:ext cx="5779770" cy="829945"/>
+          </a:xfrm>
+          <a:prstGeom prst="rect">
+            <a:avLst/>
+          </a:prstGeom>
+          <a:noFill/>
+        </p:spPr>
+        <p:txBody>
+          <a:bodyPr wrap="square" rtlCol="0">
+            <a:spAutoFit/>
+          </a:bodyPr>
+          <a:p>
+            <a:pPr algn="l"/>
+            <a:r>
+              <a:rPr lang="ru-RU" altLang="ru-RU" sz="2400" b="1">
+                <a:solidFill>
+                  <a:srgbClr val="5BD582"/>
+                </a:solidFill>
+                <a:latin typeface="Cascadia Code" panose="020B0609020000020004" charset="0"/>
+                <a:cs typeface="Cascadia Code" panose="020B0609020000020004" charset="0"/>
+              </a:rPr>
+              <a:t>- </a:t>
+            </a:r>
+            <a:r>
+              <a:rPr lang="en-US" altLang="en-US" sz="2400" b="1">
+                <a:solidFill>
+                  <a:srgbClr val="5BD582"/>
+                </a:solidFill>
+                <a:latin typeface="Cascadia Code" panose="020B0609020000020004" charset="0"/>
+                <a:cs typeface="Cascadia Code" panose="020B0609020000020004" charset="0"/>
+              </a:rPr>
+              <a:t>Полная</a:t>
+            </a:r>
+            <a:r>
+              <a:rPr lang="en-US" altLang="ru-RU" sz="2400" b="1">
+                <a:solidFill>
+                  <a:srgbClr val="5BD582"/>
+                </a:solidFill>
+                <a:latin typeface="Cascadia Code" panose="020B0609020000020004" charset="0"/>
+                <a:cs typeface="Cascadia Code" panose="020B0609020000020004" charset="0"/>
+              </a:rPr>
+              <a:t> </a:t>
+            </a:r>
+            <a:r>
+              <a:rPr lang="en-US" altLang="en-US" sz="2400" b="1">
+                <a:solidFill>
+                  <a:srgbClr val="5BD582"/>
+                </a:solidFill>
+                <a:latin typeface="Cascadia Code" panose="020B0609020000020004" charset="0"/>
+                <a:cs typeface="Cascadia Code" panose="020B0609020000020004" charset="0"/>
+              </a:rPr>
+              <a:t>автоматизация</a:t>
+            </a:r>
+            <a:r>
+              <a:rPr lang="en-US" altLang="ru-RU" sz="2400" b="1">
+                <a:solidFill>
+                  <a:srgbClr val="5BD582"/>
+                </a:solidFill>
+                <a:latin typeface="Cascadia Code" panose="020B0609020000020004" charset="0"/>
+                <a:cs typeface="Cascadia Code" panose="020B0609020000020004" charset="0"/>
+              </a:rPr>
+              <a:t> </a:t>
+            </a:r>
+            <a:r>
+              <a:rPr lang="en-US" altLang="en-US" sz="2400" b="1">
+                <a:solidFill>
+                  <a:srgbClr val="5BD582"/>
+                </a:solidFill>
+                <a:latin typeface="Cascadia Code" panose="020B0609020000020004" charset="0"/>
+                <a:cs typeface="Cascadia Code" panose="020B0609020000020004" charset="0"/>
+              </a:rPr>
+              <a:t>цикла</a:t>
+            </a:r>
+            <a:r>
+              <a:rPr lang="en-US" altLang="ru-RU" sz="2400" b="1">
+                <a:solidFill>
+                  <a:srgbClr val="5BD582"/>
+                </a:solidFill>
+                <a:latin typeface="Cascadia Code" panose="020B0609020000020004" charset="0"/>
+                <a:cs typeface="Cascadia Code" panose="020B0609020000020004" charset="0"/>
+              </a:rPr>
+              <a:t> </a:t>
+            </a:r>
+            <a:r>
+              <a:rPr lang="en-US" altLang="en-US" sz="2400" b="1">
+                <a:solidFill>
+                  <a:srgbClr val="5BD582"/>
+                </a:solidFill>
+                <a:latin typeface="Cascadia Code" panose="020B0609020000020004" charset="0"/>
+                <a:cs typeface="Cascadia Code" panose="020B0609020000020004" charset="0"/>
+              </a:rPr>
+              <a:t>тестирования</a:t>
+            </a:r>
+            <a:endParaRPr lang="en-US" altLang="en-US" sz="2400" b="1">
+              <a:solidFill>
+                <a:srgbClr val="5BD582"/>
+              </a:solidFill>
+              <a:latin typeface="Cascadia Code" panose="020B0609020000020004" charset="0"/>
+              <a:cs typeface="Cascadia Code" panose="020B0609020000020004" charset="0"/>
+            </a:endParaRPr>
+          </a:p>
+        </p:txBody>
+      </p:sp>
+      <p:sp>
+        <p:nvSpPr>
+          <p:cNvPr id="14" name="Текстовое поле 13"/>
+          <p:cNvSpPr txBox="1"/>
+          <p:nvPr/>
+        </p:nvSpPr>
+        <p:spPr>
+          <a:xfrm>
+            <a:off x="99695" y="3742690"/>
+            <a:ext cx="5779770" cy="829945"/>
+          </a:xfrm>
+          <a:prstGeom prst="rect">
+            <a:avLst/>
+          </a:prstGeom>
+          <a:noFill/>
+        </p:spPr>
+        <p:txBody>
+          <a:bodyPr wrap="square" rtlCol="0">
+            <a:spAutoFit/>
+          </a:bodyPr>
+          <a:p>
+            <a:pPr algn="l"/>
+            <a:r>
+              <a:rPr lang="ru-RU" altLang="ru-RU" sz="2400" b="1">
+                <a:solidFill>
+                  <a:srgbClr val="5BD582"/>
+                </a:solidFill>
+                <a:latin typeface="Cascadia Code" panose="020B0609020000020004" charset="0"/>
+                <a:cs typeface="Cascadia Code" panose="020B0609020000020004" charset="0"/>
+              </a:rPr>
+              <a:t>- </a:t>
+            </a:r>
+            <a:r>
+              <a:rPr lang="en-US" altLang="en-US" sz="2400" b="1">
+                <a:solidFill>
+                  <a:srgbClr val="5BD582"/>
+                </a:solidFill>
+                <a:latin typeface="Cascadia Code" panose="020B0609020000020004" charset="0"/>
+                <a:cs typeface="Cascadia Code" panose="020B0609020000020004" charset="0"/>
+              </a:rPr>
+              <a:t>Детальная</a:t>
+            </a:r>
+            <a:r>
+              <a:rPr lang="en-US" altLang="ru-RU" sz="2400" b="1">
+                <a:solidFill>
+                  <a:srgbClr val="5BD582"/>
+                </a:solidFill>
+                <a:latin typeface="Cascadia Code" panose="020B0609020000020004" charset="0"/>
+                <a:cs typeface="Cascadia Code" panose="020B0609020000020004" charset="0"/>
+              </a:rPr>
+              <a:t> </a:t>
+            </a:r>
+            <a:r>
+              <a:rPr lang="en-US" altLang="en-US" sz="2400" b="1">
+                <a:solidFill>
+                  <a:srgbClr val="5BD582"/>
+                </a:solidFill>
+                <a:latin typeface="Cascadia Code" panose="020B0609020000020004" charset="0"/>
+                <a:cs typeface="Cascadia Code" panose="020B0609020000020004" charset="0"/>
+              </a:rPr>
+              <a:t>статистика</a:t>
+            </a:r>
+            <a:r>
+              <a:rPr lang="en-US" altLang="ru-RU" sz="2400" b="1">
+                <a:solidFill>
+                  <a:srgbClr val="5BD582"/>
+                </a:solidFill>
+                <a:latin typeface="Cascadia Code" panose="020B0609020000020004" charset="0"/>
+                <a:cs typeface="Cascadia Code" panose="020B0609020000020004" charset="0"/>
+              </a:rPr>
+              <a:t> </a:t>
+            </a:r>
+            <a:r>
+              <a:rPr lang="en-US" altLang="en-US" sz="2400" b="1">
+                <a:solidFill>
+                  <a:srgbClr val="5BD582"/>
+                </a:solidFill>
+                <a:latin typeface="Cascadia Code" panose="020B0609020000020004" charset="0"/>
+                <a:cs typeface="Cascadia Code" panose="020B0609020000020004" charset="0"/>
+              </a:rPr>
+              <a:t>и</a:t>
+            </a:r>
+            <a:r>
+              <a:rPr lang="en-US" altLang="ru-RU" sz="2400" b="1">
+                <a:solidFill>
+                  <a:srgbClr val="5BD582"/>
+                </a:solidFill>
+                <a:latin typeface="Cascadia Code" panose="020B0609020000020004" charset="0"/>
+                <a:cs typeface="Cascadia Code" panose="020B0609020000020004" charset="0"/>
+              </a:rPr>
+              <a:t> </a:t>
+            </a:r>
+            <a:r>
+              <a:rPr lang="en-US" altLang="en-US" sz="2400" b="1">
+                <a:solidFill>
+                  <a:srgbClr val="5BD582"/>
+                </a:solidFill>
+                <a:latin typeface="Cascadia Code" panose="020B0609020000020004" charset="0"/>
+                <a:cs typeface="Cascadia Code" panose="020B0609020000020004" charset="0"/>
+              </a:rPr>
+              <a:t>аналитика</a:t>
+            </a:r>
+            <a:r>
+              <a:rPr lang="en-US" altLang="ru-RU" sz="2400" b="1">
+                <a:solidFill>
+                  <a:srgbClr val="5BD582"/>
+                </a:solidFill>
+                <a:latin typeface="Cascadia Code" panose="020B0609020000020004" charset="0"/>
+                <a:cs typeface="Cascadia Code" panose="020B0609020000020004" charset="0"/>
+              </a:rPr>
+              <a:t> </a:t>
+            </a:r>
+            <a:r>
+              <a:rPr lang="en-US" altLang="en-US" sz="2400" b="1">
+                <a:solidFill>
+                  <a:srgbClr val="5BD582"/>
+                </a:solidFill>
+                <a:latin typeface="Cascadia Code" panose="020B0609020000020004" charset="0"/>
+                <a:cs typeface="Cascadia Code" panose="020B0609020000020004" charset="0"/>
+              </a:rPr>
+              <a:t>результатов</a:t>
+            </a:r>
+            <a:endParaRPr lang="en-US" altLang="en-US" sz="2400" b="1">
+              <a:solidFill>
+                <a:srgbClr val="5BD582"/>
+              </a:solidFill>
+              <a:latin typeface="Cascadia Code" panose="020B0609020000020004" charset="0"/>
+              <a:cs typeface="Cascadia Code" panose="020B0609020000020004" charset="0"/>
+            </a:endParaRPr>
+          </a:p>
+        </p:txBody>
+      </p:sp>
+      <p:sp>
+        <p:nvSpPr>
+          <p:cNvPr id="16" name="Текстовое поле 15"/>
+          <p:cNvSpPr txBox="1"/>
+          <p:nvPr/>
+        </p:nvSpPr>
+        <p:spPr>
+          <a:xfrm>
+            <a:off x="99695" y="4664075"/>
+            <a:ext cx="5702935" cy="460375"/>
+          </a:xfrm>
+          <a:prstGeom prst="rect">
+            <a:avLst/>
+          </a:prstGeom>
+          <a:noFill/>
+        </p:spPr>
+        <p:txBody>
+          <a:bodyPr wrap="square" rtlCol="0">
+            <a:spAutoFit/>
+          </a:bodyPr>
+          <a:p>
+            <a:pPr algn="l"/>
+            <a:r>
+              <a:rPr lang="ru-RU" altLang="ru-RU" sz="2400" b="1">
+                <a:solidFill>
+                  <a:srgbClr val="5BD582"/>
+                </a:solidFill>
+                <a:latin typeface="Cascadia Code" panose="020B0609020000020004" charset="0"/>
+                <a:cs typeface="Cascadia Code" panose="020B0609020000020004" charset="0"/>
+              </a:rPr>
+              <a:t>- </a:t>
+            </a:r>
+            <a:r>
+              <a:rPr lang="en-US" altLang="en-US" sz="2400" b="1">
+                <a:solidFill>
+                  <a:srgbClr val="5BD582"/>
+                </a:solidFill>
+                <a:latin typeface="Cascadia Code" panose="020B0609020000020004" charset="0"/>
+                <a:cs typeface="Cascadia Code" panose="020B0609020000020004" charset="0"/>
+              </a:rPr>
+              <a:t>Готовые</a:t>
+            </a:r>
+            <a:r>
+              <a:rPr lang="en-US" altLang="ru-RU" sz="2400" b="1">
+                <a:solidFill>
+                  <a:srgbClr val="5BD582"/>
+                </a:solidFill>
+                <a:latin typeface="Cascadia Code" panose="020B0609020000020004" charset="0"/>
+                <a:cs typeface="Cascadia Code" panose="020B0609020000020004" charset="0"/>
+              </a:rPr>
+              <a:t> </a:t>
+            </a:r>
+            <a:r>
+              <a:rPr lang="en-US" altLang="en-US" sz="2400" b="1">
+                <a:solidFill>
+                  <a:srgbClr val="5BD582"/>
+                </a:solidFill>
+                <a:latin typeface="Cascadia Code" panose="020B0609020000020004" charset="0"/>
+                <a:cs typeface="Cascadia Code" panose="020B0609020000020004" charset="0"/>
+              </a:rPr>
+              <a:t>шаблоны</a:t>
+            </a:r>
+            <a:r>
+              <a:rPr lang="en-US" altLang="ru-RU" sz="2400" b="1">
+                <a:solidFill>
+                  <a:srgbClr val="5BD582"/>
+                </a:solidFill>
+                <a:latin typeface="Cascadia Code" panose="020B0609020000020004" charset="0"/>
+                <a:cs typeface="Cascadia Code" panose="020B0609020000020004" charset="0"/>
+              </a:rPr>
+              <a:t> </a:t>
+            </a:r>
+            <a:r>
+              <a:rPr lang="en-US" altLang="en-US" sz="2400" b="1">
+                <a:solidFill>
+                  <a:srgbClr val="5BD582"/>
+                </a:solidFill>
+                <a:latin typeface="Cascadia Code" panose="020B0609020000020004" charset="0"/>
+                <a:cs typeface="Cascadia Code" panose="020B0609020000020004" charset="0"/>
+              </a:rPr>
+              <a:t>сертификатов</a:t>
+            </a:r>
+            <a:endParaRPr lang="en-US" altLang="en-US" sz="2400" b="1">
+              <a:solidFill>
+                <a:srgbClr val="5BD582"/>
+              </a:solidFill>
+              <a:latin typeface="Cascadia Code" panose="020B0609020000020004" charset="0"/>
+              <a:cs typeface="Cascadia Code" panose="020B0609020000020004" charset="0"/>
+            </a:endParaRPr>
+          </a:p>
+        </p:txBody>
+      </p:sp>
+      <p:sp>
+        <p:nvSpPr>
+          <p:cNvPr id="20" name="Текстовое поле 19"/>
+          <p:cNvSpPr txBox="1"/>
+          <p:nvPr/>
+        </p:nvSpPr>
+        <p:spPr>
+          <a:xfrm>
+            <a:off x="6236335" y="1793240"/>
+            <a:ext cx="5867400" cy="829945"/>
+          </a:xfrm>
+          <a:prstGeom prst="rect">
+            <a:avLst/>
+          </a:prstGeom>
+          <a:noFill/>
+        </p:spPr>
+        <p:txBody>
+          <a:bodyPr wrap="square" rtlCol="0">
+            <a:spAutoFit/>
+          </a:bodyPr>
+          <a:p>
+            <a:pPr algn="l"/>
+            <a:r>
+              <a:rPr lang="ru-RU" altLang="en-US" sz="2400" b="1">
+                <a:solidFill>
+                  <a:srgbClr val="5B9CD5"/>
+                </a:solidFill>
+                <a:latin typeface="Cascadia Code" panose="020B0609020000020004" charset="0"/>
+                <a:cs typeface="Cascadia Code" panose="020B0609020000020004" charset="0"/>
+              </a:rPr>
+              <a:t>- </a:t>
+            </a:r>
+            <a:r>
+              <a:rPr lang="en-US" altLang="en-US" sz="2400" b="1">
+                <a:solidFill>
+                  <a:srgbClr val="5B9CD5"/>
+                </a:solidFill>
+                <a:latin typeface="Cascadia Code" panose="020B0609020000020004" charset="0"/>
+                <a:cs typeface="Cascadia Code" panose="020B0609020000020004" charset="0"/>
+              </a:rPr>
+              <a:t>Только</a:t>
+            </a:r>
+            <a:r>
+              <a:rPr lang="en-US" altLang="ru-RU" sz="2400" b="1">
+                <a:solidFill>
+                  <a:srgbClr val="5B9CD5"/>
+                </a:solidFill>
+                <a:latin typeface="Cascadia Code" panose="020B0609020000020004" charset="0"/>
+                <a:cs typeface="Cascadia Code" panose="020B0609020000020004" charset="0"/>
+              </a:rPr>
+              <a:t> </a:t>
+            </a:r>
+            <a:r>
+              <a:rPr lang="en-US" altLang="en-US" sz="2400" b="1">
+                <a:solidFill>
+                  <a:srgbClr val="5B9CD5"/>
+                </a:solidFill>
+                <a:latin typeface="Cascadia Code" panose="020B0609020000020004" charset="0"/>
+                <a:cs typeface="Cascadia Code" panose="020B0609020000020004" charset="0"/>
+              </a:rPr>
+              <a:t>один</a:t>
+            </a:r>
+            <a:r>
+              <a:rPr lang="en-US" altLang="ru-RU" sz="2400" b="1">
+                <a:solidFill>
+                  <a:srgbClr val="5B9CD5"/>
+                </a:solidFill>
+                <a:latin typeface="Cascadia Code" panose="020B0609020000020004" charset="0"/>
+                <a:cs typeface="Cascadia Code" panose="020B0609020000020004" charset="0"/>
+              </a:rPr>
+              <a:t> </a:t>
+            </a:r>
+            <a:r>
+              <a:rPr lang="en-US" altLang="en-US" sz="2400" b="1">
+                <a:solidFill>
+                  <a:srgbClr val="5B9CD5"/>
+                </a:solidFill>
+                <a:latin typeface="Cascadia Code" panose="020B0609020000020004" charset="0"/>
+                <a:cs typeface="Cascadia Code" panose="020B0609020000020004" charset="0"/>
+              </a:rPr>
+              <a:t>тип</a:t>
+            </a:r>
+            <a:r>
+              <a:rPr lang="en-US" altLang="ru-RU" sz="2400" b="1">
+                <a:solidFill>
+                  <a:srgbClr val="5B9CD5"/>
+                </a:solidFill>
+                <a:latin typeface="Cascadia Code" panose="020B0609020000020004" charset="0"/>
+                <a:cs typeface="Cascadia Code" panose="020B0609020000020004" charset="0"/>
+              </a:rPr>
+              <a:t> </a:t>
+            </a:r>
+            <a:r>
+              <a:rPr lang="en-US" altLang="en-US" sz="2400" b="1">
+                <a:solidFill>
+                  <a:srgbClr val="5B9CD5"/>
+                </a:solidFill>
+                <a:latin typeface="Cascadia Code" panose="020B0609020000020004" charset="0"/>
+                <a:cs typeface="Cascadia Code" panose="020B0609020000020004" charset="0"/>
+              </a:rPr>
+              <a:t>вопросов</a:t>
+            </a:r>
+            <a:r>
+              <a:rPr lang="en-US" altLang="ru-RU" sz="2400" b="1">
+                <a:solidFill>
+                  <a:srgbClr val="5B9CD5"/>
+                </a:solidFill>
+                <a:latin typeface="Cascadia Code" panose="020B0609020000020004" charset="0"/>
+                <a:cs typeface="Cascadia Code" panose="020B0609020000020004" charset="0"/>
+              </a:rPr>
+              <a:t> (</a:t>
+            </a:r>
+            <a:r>
+              <a:rPr lang="en-US" altLang="en-US" sz="2400" b="1">
+                <a:solidFill>
+                  <a:srgbClr val="5B9CD5"/>
+                </a:solidFill>
+                <a:latin typeface="Cascadia Code" panose="020B0609020000020004" charset="0"/>
+                <a:cs typeface="Cascadia Code" panose="020B0609020000020004" charset="0"/>
+              </a:rPr>
+              <a:t>выбор</a:t>
+            </a:r>
+            <a:r>
+              <a:rPr lang="en-US" altLang="ru-RU" sz="2400" b="1">
+                <a:solidFill>
+                  <a:srgbClr val="5B9CD5"/>
+                </a:solidFill>
+                <a:latin typeface="Cascadia Code" panose="020B0609020000020004" charset="0"/>
+                <a:cs typeface="Cascadia Code" panose="020B0609020000020004" charset="0"/>
+              </a:rPr>
+              <a:t> </a:t>
+            </a:r>
+            <a:r>
+              <a:rPr lang="en-US" altLang="en-US" sz="2400" b="1">
+                <a:solidFill>
+                  <a:srgbClr val="5B9CD5"/>
+                </a:solidFill>
+                <a:latin typeface="Cascadia Code" panose="020B0609020000020004" charset="0"/>
+                <a:cs typeface="Cascadia Code" panose="020B0609020000020004" charset="0"/>
+              </a:rPr>
+              <a:t>одного</a:t>
+            </a:r>
+            <a:r>
+              <a:rPr lang="en-US" altLang="ru-RU" sz="2400" b="1">
+                <a:solidFill>
+                  <a:srgbClr val="5B9CD5"/>
+                </a:solidFill>
+                <a:latin typeface="Cascadia Code" panose="020B0609020000020004" charset="0"/>
+                <a:cs typeface="Cascadia Code" panose="020B0609020000020004" charset="0"/>
+              </a:rPr>
+              <a:t> </a:t>
+            </a:r>
+            <a:r>
+              <a:rPr lang="en-US" altLang="en-US" sz="2400" b="1">
+                <a:solidFill>
+                  <a:srgbClr val="5B9CD5"/>
+                </a:solidFill>
+                <a:latin typeface="Cascadia Code" panose="020B0609020000020004" charset="0"/>
+                <a:cs typeface="Cascadia Code" panose="020B0609020000020004" charset="0"/>
+              </a:rPr>
+              <a:t>варианта</a:t>
+            </a:r>
+            <a:r>
+              <a:rPr lang="en-US" altLang="ru-RU" sz="2400" b="1">
+                <a:solidFill>
+                  <a:srgbClr val="5B9CD5"/>
+                </a:solidFill>
+                <a:latin typeface="Cascadia Code" panose="020B0609020000020004" charset="0"/>
+                <a:cs typeface="Cascadia Code" panose="020B0609020000020004" charset="0"/>
+              </a:rPr>
+              <a:t>)</a:t>
+            </a:r>
+            <a:r>
+              <a:rPr lang="en-US" altLang="ru-RU" sz="2400" b="1">
+                <a:solidFill>
+                  <a:srgbClr val="5B9CD5"/>
+                </a:solidFill>
+                <a:latin typeface="Cascadia Code" panose="020B0609020000020004" charset="0"/>
+                <a:cs typeface="Cascadia Code" panose="020B0609020000020004" charset="0"/>
+              </a:rPr>
+              <a:t> </a:t>
+            </a:r>
+            <a:endParaRPr lang="en-US" altLang="ru-RU" sz="2400" b="1">
+              <a:solidFill>
+                <a:srgbClr val="5B9CD5"/>
+              </a:solidFill>
+              <a:latin typeface="Cascadia Code" panose="020B0609020000020004" charset="0"/>
+              <a:cs typeface="Cascadia Code" panose="020B0609020000020004" charset="0"/>
+            </a:endParaRPr>
+          </a:p>
+        </p:txBody>
+      </p:sp>
+      <p:sp>
+        <p:nvSpPr>
+          <p:cNvPr id="23" name="Текстовое поле 22"/>
+          <p:cNvSpPr txBox="1"/>
+          <p:nvPr/>
+        </p:nvSpPr>
+        <p:spPr>
+          <a:xfrm>
+            <a:off x="6312535" y="2823845"/>
+            <a:ext cx="5791200" cy="829945"/>
+          </a:xfrm>
+          <a:prstGeom prst="rect">
+            <a:avLst/>
+          </a:prstGeom>
+          <a:noFill/>
+        </p:spPr>
+        <p:txBody>
+          <a:bodyPr wrap="square" rtlCol="0">
+            <a:spAutoFit/>
+          </a:bodyPr>
+          <a:p>
+            <a:pPr algn="l"/>
+            <a:r>
+              <a:rPr lang="ru-RU" altLang="en-US" sz="2400" b="1">
+                <a:solidFill>
+                  <a:srgbClr val="5B9CD5"/>
+                </a:solidFill>
+                <a:latin typeface="Cascadia Code" panose="020B0609020000020004" charset="0"/>
+                <a:cs typeface="Cascadia Code" panose="020B0609020000020004" charset="0"/>
+              </a:rPr>
+              <a:t>- </a:t>
+            </a:r>
+            <a:r>
+              <a:rPr lang="en-US" altLang="en-US" sz="2400" b="1">
+                <a:solidFill>
+                  <a:srgbClr val="5B9CD5"/>
+                </a:solidFill>
+                <a:latin typeface="Cascadia Code" panose="020B0609020000020004" charset="0"/>
+                <a:cs typeface="Cascadia Code" panose="020B0609020000020004" charset="0"/>
+              </a:rPr>
+              <a:t>Нет</a:t>
+            </a:r>
+            <a:r>
+              <a:rPr lang="en-US" altLang="ru-RU" sz="2400" b="1">
+                <a:solidFill>
+                  <a:srgbClr val="5B9CD5"/>
+                </a:solidFill>
+                <a:latin typeface="Cascadia Code" panose="020B0609020000020004" charset="0"/>
+                <a:cs typeface="Cascadia Code" panose="020B0609020000020004" charset="0"/>
+              </a:rPr>
+              <a:t> </a:t>
+            </a:r>
+            <a:r>
+              <a:rPr lang="en-US" altLang="en-US" sz="2400" b="1">
+                <a:solidFill>
+                  <a:srgbClr val="5B9CD5"/>
+                </a:solidFill>
+                <a:latin typeface="Cascadia Code" panose="020B0609020000020004" charset="0"/>
+                <a:cs typeface="Cascadia Code" panose="020B0609020000020004" charset="0"/>
+              </a:rPr>
+              <a:t>возможности</a:t>
+            </a:r>
+            <a:r>
+              <a:rPr lang="en-US" altLang="ru-RU" sz="2400" b="1">
+                <a:solidFill>
+                  <a:srgbClr val="5B9CD5"/>
+                </a:solidFill>
+                <a:latin typeface="Cascadia Code" panose="020B0609020000020004" charset="0"/>
+                <a:cs typeface="Cascadia Code" panose="020B0609020000020004" charset="0"/>
+              </a:rPr>
+              <a:t> </a:t>
+            </a:r>
+            <a:r>
+              <a:rPr lang="en-US" altLang="en-US" sz="2400" b="1">
+                <a:solidFill>
+                  <a:srgbClr val="5B9CD5"/>
+                </a:solidFill>
+                <a:latin typeface="Cascadia Code" panose="020B0609020000020004" charset="0"/>
+                <a:cs typeface="Cascadia Code" panose="020B0609020000020004" charset="0"/>
+              </a:rPr>
+              <a:t>вернуться</a:t>
+            </a:r>
+            <a:r>
+              <a:rPr lang="en-US" altLang="ru-RU" sz="2400" b="1">
+                <a:solidFill>
+                  <a:srgbClr val="5B9CD5"/>
+                </a:solidFill>
+                <a:latin typeface="Cascadia Code" panose="020B0609020000020004" charset="0"/>
+                <a:cs typeface="Cascadia Code" panose="020B0609020000020004" charset="0"/>
+              </a:rPr>
+              <a:t> </a:t>
+            </a:r>
+            <a:r>
+              <a:rPr lang="en-US" altLang="en-US" sz="2400" b="1">
+                <a:solidFill>
+                  <a:srgbClr val="5B9CD5"/>
+                </a:solidFill>
+                <a:latin typeface="Cascadia Code" panose="020B0609020000020004" charset="0"/>
+                <a:cs typeface="Cascadia Code" panose="020B0609020000020004" charset="0"/>
+              </a:rPr>
+              <a:t>к</a:t>
+            </a:r>
+            <a:r>
+              <a:rPr lang="en-US" altLang="ru-RU" sz="2400" b="1">
+                <a:solidFill>
+                  <a:srgbClr val="5B9CD5"/>
+                </a:solidFill>
+                <a:latin typeface="Cascadia Code" panose="020B0609020000020004" charset="0"/>
+                <a:cs typeface="Cascadia Code" panose="020B0609020000020004" charset="0"/>
+              </a:rPr>
+              <a:t> </a:t>
+            </a:r>
+            <a:r>
+              <a:rPr lang="en-US" altLang="en-US" sz="2400" b="1">
+                <a:solidFill>
+                  <a:srgbClr val="5B9CD5"/>
+                </a:solidFill>
+                <a:latin typeface="Cascadia Code" panose="020B0609020000020004" charset="0"/>
+                <a:cs typeface="Cascadia Code" panose="020B0609020000020004" charset="0"/>
+              </a:rPr>
+              <a:t>предыдущему</a:t>
+            </a:r>
+            <a:r>
+              <a:rPr lang="en-US" altLang="ru-RU" sz="2400" b="1">
+                <a:solidFill>
+                  <a:srgbClr val="5B9CD5"/>
+                </a:solidFill>
+                <a:latin typeface="Cascadia Code" panose="020B0609020000020004" charset="0"/>
+                <a:cs typeface="Cascadia Code" panose="020B0609020000020004" charset="0"/>
+              </a:rPr>
+              <a:t> </a:t>
+            </a:r>
+            <a:r>
+              <a:rPr lang="en-US" altLang="en-US" sz="2400" b="1">
+                <a:solidFill>
+                  <a:srgbClr val="5B9CD5"/>
+                </a:solidFill>
+                <a:latin typeface="Cascadia Code" panose="020B0609020000020004" charset="0"/>
+                <a:cs typeface="Cascadia Code" panose="020B0609020000020004" charset="0"/>
+              </a:rPr>
+              <a:t>вопросу</a:t>
+            </a:r>
+            <a:endParaRPr lang="en-US" altLang="en-US" sz="2400" b="1">
+              <a:solidFill>
+                <a:srgbClr val="5B9CD5"/>
+              </a:solidFill>
+              <a:latin typeface="Cascadia Code" panose="020B0609020000020004" charset="0"/>
+              <a:cs typeface="Cascadia Code" panose="020B0609020000020004" charset="0"/>
+            </a:endParaRPr>
+          </a:p>
+        </p:txBody>
+      </p:sp>
+      <p:sp>
+        <p:nvSpPr>
+          <p:cNvPr id="26" name="Текстовое поле 25"/>
+          <p:cNvSpPr txBox="1"/>
+          <p:nvPr/>
+        </p:nvSpPr>
+        <p:spPr>
+          <a:xfrm>
+            <a:off x="6312535" y="3917950"/>
+            <a:ext cx="5791200" cy="829945"/>
+          </a:xfrm>
+          <a:prstGeom prst="rect">
+            <a:avLst/>
+          </a:prstGeom>
+          <a:noFill/>
+        </p:spPr>
+        <p:txBody>
+          <a:bodyPr wrap="square" rtlCol="0">
+            <a:spAutoFit/>
+          </a:bodyPr>
+          <a:p>
+            <a:pPr algn="l"/>
+            <a:r>
+              <a:rPr lang="ru-RU" altLang="en-US" sz="2400" b="1">
+                <a:solidFill>
+                  <a:srgbClr val="5B9CD5"/>
+                </a:solidFill>
+                <a:latin typeface="Cascadia Code" panose="020B0609020000020004" charset="0"/>
+                <a:cs typeface="Cascadia Code" panose="020B0609020000020004" charset="0"/>
+              </a:rPr>
+              <a:t>- </a:t>
+            </a:r>
+            <a:r>
+              <a:rPr lang="en-US" altLang="en-US" sz="2400" b="1">
+                <a:solidFill>
+                  <a:srgbClr val="5B9CD5"/>
+                </a:solidFill>
+                <a:latin typeface="Cascadia Code" panose="020B0609020000020004" charset="0"/>
+                <a:cs typeface="Cascadia Code" panose="020B0609020000020004" charset="0"/>
+              </a:rPr>
+              <a:t>Ограниченный</a:t>
+            </a:r>
+            <a:r>
+              <a:rPr lang="en-US" altLang="ru-RU" sz="2400" b="1">
+                <a:solidFill>
+                  <a:srgbClr val="5B9CD5"/>
+                </a:solidFill>
+                <a:latin typeface="Cascadia Code" panose="020B0609020000020004" charset="0"/>
+                <a:cs typeface="Cascadia Code" panose="020B0609020000020004" charset="0"/>
+              </a:rPr>
+              <a:t> </a:t>
+            </a:r>
+            <a:r>
+              <a:rPr lang="en-US" altLang="en-US" sz="2400" b="1">
+                <a:solidFill>
+                  <a:srgbClr val="5B9CD5"/>
+                </a:solidFill>
+                <a:latin typeface="Cascadia Code" panose="020B0609020000020004" charset="0"/>
+                <a:cs typeface="Cascadia Code" panose="020B0609020000020004" charset="0"/>
+              </a:rPr>
+              <a:t>функционал</a:t>
+            </a:r>
+            <a:r>
+              <a:rPr lang="en-US" altLang="ru-RU" sz="2400" b="1">
+                <a:solidFill>
+                  <a:srgbClr val="5B9CD5"/>
+                </a:solidFill>
+                <a:latin typeface="Cascadia Code" panose="020B0609020000020004" charset="0"/>
+                <a:cs typeface="Cascadia Code" panose="020B0609020000020004" charset="0"/>
+              </a:rPr>
+              <a:t> </a:t>
+            </a:r>
+            <a:r>
+              <a:rPr lang="en-US" altLang="en-US" sz="2400" b="1">
+                <a:solidFill>
+                  <a:srgbClr val="5B9CD5"/>
+                </a:solidFill>
+                <a:latin typeface="Cascadia Code" panose="020B0609020000020004" charset="0"/>
+                <a:cs typeface="Cascadia Code" panose="020B0609020000020004" charset="0"/>
+              </a:rPr>
+              <a:t>мобильной</a:t>
+            </a:r>
+            <a:r>
+              <a:rPr lang="en-US" altLang="ru-RU" sz="2400" b="1">
+                <a:solidFill>
+                  <a:srgbClr val="5B9CD5"/>
+                </a:solidFill>
+                <a:latin typeface="Cascadia Code" panose="020B0609020000020004" charset="0"/>
+                <a:cs typeface="Cascadia Code" panose="020B0609020000020004" charset="0"/>
+              </a:rPr>
+              <a:t> </a:t>
+            </a:r>
+            <a:r>
+              <a:rPr lang="en-US" altLang="en-US" sz="2400" b="1">
+                <a:solidFill>
+                  <a:srgbClr val="5B9CD5"/>
+                </a:solidFill>
+                <a:latin typeface="Cascadia Code" panose="020B0609020000020004" charset="0"/>
+                <a:cs typeface="Cascadia Code" panose="020B0609020000020004" charset="0"/>
+              </a:rPr>
+              <a:t>версии</a:t>
+            </a:r>
+            <a:endParaRPr lang="en-US" altLang="en-US" sz="2400" b="1">
+              <a:solidFill>
+                <a:srgbClr val="5B9CD5"/>
+              </a:solidFill>
+              <a:latin typeface="Cascadia Code" panose="020B0609020000020004" charset="0"/>
+              <a:cs typeface="Cascadia Code" panose="020B0609020000020004" charset="0"/>
+            </a:endParaRPr>
+          </a:p>
+        </p:txBody>
+      </p:sp>
+    </p:spTree>
+  </p:cSld>
+  <p:clrMapOvr>
+    <a:masterClrMapping/>
+  </p:clrMapOvr>
+  <mc:AlternateContent xmlns:mc="http://schemas.openxmlformats.org/markup-compatibility/2006">
+    <mc:Choice xmlns:p14="http://schemas.microsoft.com/office/powerpoint/2010/main" Requires="p14">
+      <p:transition spd="med" p14:dur="699">
+        <p:fade/>
+      </p:transition>
+    </mc:Choice>
+    <mc:Fallback>
+      <p:transition spd="med">
+        <p:fade/>
+      </p:transition>
+    </mc:Fallback>
+  </mc:AlternateContent>
+</p:sld>
+</file>
+
+<file path=ppt/slides/slide11.xml><?xml version="1.0" encoding="utf-8"?>
+<p:sld xmlns:a="http://schemas.openxmlformats.org/drawingml/2006/main" xmlns:r="http://schemas.openxmlformats.org/officeDocument/2006/relationships" xmlns:p="http://schemas.openxmlformats.org/presentationml/2006/main">
+  <p:cSld>
+    <p:bg>
+      <p:bgPr>
+        <a:solidFill>
+          <a:schemeClr val="bg1"/>
+        </a:solidFill>
+        <a:effectLst/>
+      </p:bgPr>
+    </p:bg>
+    <p:spTree>
+      <p:nvGrpSpPr>
+        <p:cNvPr id="1" name=""/>
+        <p:cNvGrpSpPr/>
+        <p:nvPr/>
+      </p:nvGrpSpPr>
+      <p:grpSpPr/>
+      <p:sp>
+        <p:nvSpPr>
+          <p:cNvPr id="6" name="Скругленный прямоугольник 5"/>
+          <p:cNvSpPr/>
+          <p:nvPr/>
+        </p:nvSpPr>
+        <p:spPr>
+          <a:xfrm>
+            <a:off x="99695" y="346710"/>
+            <a:ext cx="12004040" cy="606425"/>
+          </a:xfrm>
+          <a:prstGeom prst="roundRect">
+            <a:avLst/>
+          </a:prstGeom>
+          <a:solidFill>
+            <a:schemeClr val="bg1"/>
+          </a:solidFill>
+          <a:ln w="28575" cmpd="sng">
+            <a:gradFill>
+              <a:gsLst>
+                <a:gs pos="0">
+                  <a:srgbClr val="5BD486"/>
+                </a:gs>
+                <a:gs pos="100000">
+                  <a:srgbClr val="5B9CD5"/>
+                </a:gs>
+              </a:gsLst>
+              <a:lin ang="4980000" scaled="1"/>
+            </a:gradFill>
+            <a:prstDash val="solid"/>
+          </a:ln>
+        </p:spPr>
+        <p:style>
+          <a:lnRef idx="2">
+            <a:schemeClr val="accent1">
+              <a:lumMod val="75000"/>
+            </a:schemeClr>
+          </a:lnRef>
+          <a:fillRef idx="1">
+            <a:schemeClr val="accent1"/>
+          </a:fillRef>
+          <a:effectRef idx="0">
+            <a:srgbClr val="FFFFFF"/>
+          </a:effectRef>
+          <a:fontRef idx="minor">
+            <a:schemeClr val="lt1"/>
+          </a:fontRef>
+        </p:style>
+        <p:txBody>
+          <a:bodyPr rtlCol="0" anchor="ctr"/>
+          <a:p>
+            <a:pPr algn="ctr"/>
+            <a:r>
+              <a:rPr lang="ru-RU" sz="2800">
+                <a:solidFill>
+                  <a:schemeClr val="tx1"/>
+                </a:solidFill>
+                <a:effectLst/>
+                <a:latin typeface="Cascadia Code" panose="020B0609020000020004" charset="0"/>
+                <a:cs typeface="Cascadia Code" panose="020B0609020000020004" charset="0"/>
+                <a:sym typeface="+mn-ea"/>
+              </a:rPr>
               <a:t>Перспективы проекта</a:t>
             </a:r>
             <a:endParaRPr lang="ru-RU" sz="2800">
@@ -5089,7 +6247,7 @@
 </p:sld>
 </file>
 
-<file path=ppt/slides/slide11.xml><?xml version="1.0" encoding="utf-8"?>
+<file path=ppt/slides/slide12.xml><?xml version="1.0" encoding="utf-8"?>
 <p:sld xmlns:a="http://schemas.openxmlformats.org/drawingml/2006/main" xmlns:r="http://schemas.openxmlformats.org/officeDocument/2006/relationships" xmlns:p="http://schemas.openxmlformats.org/presentationml/2006/main">
   <p:cSld>
     <p:bg>
@@ -8991,6 +10149,319 @@
         </p:nvSpPr>
         <p:spPr>
           <a:xfrm>
+            <a:off x="2000885" y="67310"/>
+            <a:ext cx="8190865" cy="606425"/>
+          </a:xfrm>
+          <a:prstGeom prst="roundRect">
+            <a:avLst/>
+          </a:prstGeom>
+          <a:solidFill>
+            <a:schemeClr val="bg1"/>
+          </a:solidFill>
+          <a:ln w="28575" cmpd="sng">
+            <a:gradFill>
+              <a:gsLst>
+                <a:gs pos="0">
+                  <a:srgbClr val="5BD583"/>
+                </a:gs>
+                <a:gs pos="100000">
+                  <a:srgbClr val="5B9CD5"/>
+                </a:gs>
+              </a:gsLst>
+              <a:lin ang="4620000" scaled="1"/>
+            </a:gradFill>
+            <a:prstDash val="solid"/>
+          </a:ln>
+        </p:spPr>
+        <p:style>
+          <a:lnRef idx="2">
+            <a:schemeClr val="accent1">
+              <a:lumMod val="75000"/>
+            </a:schemeClr>
+          </a:lnRef>
+          <a:fillRef idx="1">
+            <a:schemeClr val="accent1"/>
+          </a:fillRef>
+          <a:effectRef idx="0">
+            <a:srgbClr val="FFFFFF"/>
+          </a:effectRef>
+          <a:fontRef idx="minor">
+            <a:schemeClr val="lt1"/>
+          </a:fontRef>
+        </p:style>
+        <p:txBody>
+          <a:bodyPr rtlCol="0" anchor="ctr"/>
+          <a:p>
+            <a:pPr algn="ctr"/>
+            <a:r>
+              <a:rPr lang="ru-RU" altLang="ru-RU" sz="2800">
+                <a:solidFill>
+                  <a:schemeClr val="tx1"/>
+                </a:solidFill>
+                <a:effectLst/>
+                <a:latin typeface="Cascadia Code" panose="020B0609020000020004" charset="0"/>
+                <a:cs typeface="Cascadia Code" panose="020B0609020000020004" charset="0"/>
+                <a:sym typeface="+mn-ea"/>
+              </a:rPr>
+              <a:t>Видео работы приложения</a:t>
+            </a:r>
+            <a:endParaRPr lang="ru-RU" altLang="ru-RU" sz="2800">
+              <a:solidFill>
+                <a:schemeClr val="tx1"/>
+              </a:solidFill>
+              <a:effectLst/>
+              <a:latin typeface="Cascadia Code" panose="020B0609020000020004" charset="0"/>
+              <a:cs typeface="Cascadia Code" panose="020B0609020000020004" charset="0"/>
+              <a:sym typeface="+mn-ea"/>
+            </a:endParaRPr>
+          </a:p>
+        </p:txBody>
+      </p:sp>
+      <p:cxnSp>
+        <p:nvCxnSpPr>
+          <p:cNvPr id="18" name="Прямое соединение 17"/>
+          <p:cNvCxnSpPr/>
+          <p:nvPr/>
+        </p:nvCxnSpPr>
+        <p:spPr>
+          <a:xfrm>
+            <a:off x="362585" y="773430"/>
+            <a:ext cx="11193780" cy="15240"/>
+          </a:xfrm>
+          <a:prstGeom prst="line">
+            <a:avLst/>
+          </a:prstGeom>
+          <a:ln w="31750">
+            <a:gradFill>
+              <a:gsLst>
+                <a:gs pos="0">
+                  <a:schemeClr val="accent1">
+                    <a:hueOff val="-4200000"/>
+                  </a:schemeClr>
+                </a:gs>
+                <a:gs pos="100000">
+                  <a:schemeClr val="accent1"/>
+                </a:gs>
+              </a:gsLst>
+            </a:gradFill>
+          </a:ln>
+        </p:spPr>
+        <p:style>
+          <a:lnRef idx="0">
+            <a:srgbClr val="FFFFFF"/>
+          </a:lnRef>
+          <a:fillRef idx="0">
+            <a:srgbClr val="FFFFFF"/>
+          </a:fillRef>
+          <a:effectRef idx="0">
+            <a:srgbClr val="FFFFFF"/>
+          </a:effectRef>
+          <a:fontRef idx="minor">
+            <a:schemeClr val="tx1"/>
+          </a:fontRef>
+        </p:style>
+      </p:cxnSp>
+      <p:cxnSp>
+        <p:nvCxnSpPr>
+          <p:cNvPr id="19" name="Прямое соединение 18"/>
+          <p:cNvCxnSpPr/>
+          <p:nvPr/>
+        </p:nvCxnSpPr>
+        <p:spPr>
+          <a:xfrm>
+            <a:off x="414655" y="6272530"/>
+            <a:ext cx="11193780" cy="15240"/>
+          </a:xfrm>
+          <a:prstGeom prst="line">
+            <a:avLst/>
+          </a:prstGeom>
+          <a:ln w="31750">
+            <a:gradFill>
+              <a:gsLst>
+                <a:gs pos="0">
+                  <a:schemeClr val="accent1">
+                    <a:hueOff val="-4200000"/>
+                  </a:schemeClr>
+                </a:gs>
+                <a:gs pos="100000">
+                  <a:schemeClr val="accent1"/>
+                </a:gs>
+              </a:gsLst>
+            </a:gradFill>
+          </a:ln>
+        </p:spPr>
+        <p:style>
+          <a:lnRef idx="0">
+            <a:srgbClr val="FFFFFF"/>
+          </a:lnRef>
+          <a:fillRef idx="0">
+            <a:srgbClr val="FFFFFF"/>
+          </a:fillRef>
+          <a:effectRef idx="0">
+            <a:srgbClr val="FFFFFF"/>
+          </a:effectRef>
+          <a:fontRef idx="minor">
+            <a:schemeClr val="tx1"/>
+          </a:fontRef>
+        </p:style>
+      </p:cxnSp>
+      <p:pic>
+        <p:nvPicPr>
+          <p:cNvPr id="3" name="2026-03-05 06-55-53">
+            <a:hlinkClick r:id="" action="ppaction://media"/>
+          </p:cNvPr>
+          <p:cNvPicPr/>
+          <p:nvPr>
+            <a:videoFile r:link="rId1"/>
+            <p:extLst>
+              <p:ext uri="{DAA4B4D4-6D71-4841-9C94-3DE7FCFB9230}">
+                <p14:media xmlns:p14="http://schemas.microsoft.com/office/powerpoint/2010/main" r:embed="rId2"/>
+              </p:ext>
+            </p:extLst>
+          </p:nvPr>
+        </p:nvPicPr>
+        <p:blipFill>
+          <a:blip r:embed="rId3"/>
+          <a:stretch>
+            <a:fillRect/>
+          </a:stretch>
+        </p:blipFill>
+        <p:spPr>
+          <a:xfrm>
+            <a:off x="1239520" y="961390"/>
+            <a:ext cx="9544685" cy="4935220"/>
+          </a:xfrm>
+          <a:prstGeom prst="rect">
+            <a:avLst/>
+          </a:prstGeom>
+        </p:spPr>
+      </p:pic>
+    </p:spTree>
+  </p:cSld>
+  <p:clrMapOvr>
+    <a:masterClrMapping/>
+  </p:clrMapOvr>
+  <mc:AlternateContent xmlns:mc="http://schemas.openxmlformats.org/markup-compatibility/2006">
+    <mc:Choice xmlns:p14="http://schemas.microsoft.com/office/powerpoint/2010/main" Requires="p14">
+      <p:transition spd="med" p14:dur="699">
+        <p:fade/>
+      </p:transition>
+    </mc:Choice>
+    <mc:Fallback>
+      <p:transition spd="med">
+        <p:fade/>
+      </p:transition>
+    </mc:Fallback>
+  </mc:AlternateContent>
+  <p:timing>
+    <p:tnLst>
+      <p:par>
+        <p:cTn id="1" dur="indefinite" restart="never" nodeType="tmRoot">
+          <p:childTnLst>
+            <p:video fullScrn="0">
+              <p:cMediaNode>
+                <p:cTn id="2" fill="hold" display="1">
+                  <p:stCondLst>
+                    <p:cond delay="indefinite"/>
+                  </p:stCondLst>
+                </p:cTn>
+                <p:tgtEl>
+                  <p:spTgt spid="3"/>
+                </p:tgtEl>
+              </p:cMediaNode>
+            </p:video>
+            <p:seq concurrent="1" nextAc="seek">
+              <p:cTn id="3" restart="whenNotActive" fill="hold" evtFilter="cancelBubble" nodeType="interactiveSeq">
+                <p:stCondLst>
+                  <p:cond evt="onClick" delay="0">
+                    <p:tgtEl>
+                      <p:spTgt spid="3"/>
+                    </p:tgtEl>
+                  </p:cond>
+                </p:stCondLst>
+                <p:endSync evt="end" delay="0">
+                  <p:rtn val="all"/>
+                </p:endSync>
+                <p:childTnLst>
+                  <p:par>
+                    <p:cTn id="4" fill="hold">
+                      <p:stCondLst>
+                        <p:cond delay="0"/>
+                      </p:stCondLst>
+                      <p:childTnLst>
+                        <p:par>
+                          <p:cTn id="5" fill="hold">
+                            <p:stCondLst>
+                              <p:cond delay="0"/>
+                            </p:stCondLst>
+                            <p:childTnLst>
+                              <p:par>
+                                <p:cTn id="6" presetID="2" presetClass="mediacall" presetSubtype="0" fill="hold" nodeType="clickEffect">
+                                  <p:stCondLst>
+                                    <p:cond delay="0"/>
+                                  </p:stCondLst>
+                                  <p:childTnLst>
+                                    <p:cmd type="call" cmd="togglePause">
+                                      <p:cBhvr additive="base">
+                                        <p:cTn id="7" dur="1" fill="hold"/>
+                                        <p:tgtEl>
+                                          <p:spTgt spid="3"/>
+                                        </p:tgtEl>
+                                      </p:cBhvr>
+                                    </p:cmd>
+                                  </p:childTnLst>
+                                </p:cTn>
+                              </p:par>
+                            </p:childTnLst>
+                          </p:cTn>
+                        </p:par>
+                      </p:childTnLst>
+                    </p:cTn>
+                  </p:par>
+                </p:childTnLst>
+              </p:cTn>
+              <p:nextCondLst>
+                <p:cond evt="onClick" delay="0">
+                  <p:tgtEl>
+                    <p:spTgt spid="3"/>
+                  </p:tgtEl>
+                </p:cond>
+              </p:nextCondLst>
+            </p:seq>
+          </p:childTnLst>
+        </p:cTn>
+      </p:par>
+    </p:tnLst>
+  </p:timing>
+</p:sld>
+</file>
+
+<file path=ppt/slides/slide7.xml><?xml version="1.0" encoding="utf-8"?>
+<p:sld xmlns:a="http://schemas.openxmlformats.org/drawingml/2006/main" xmlns:r="http://schemas.openxmlformats.org/officeDocument/2006/relationships" xmlns:p="http://schemas.openxmlformats.org/presentationml/2006/main">
+  <p:cSld>
+    <p:bg>
+      <p:bgPr>
+        <a:solidFill>
+          <a:schemeClr val="bg1"/>
+        </a:solidFill>
+        <a:effectLst/>
+      </p:bgPr>
+    </p:bg>
+    <p:spTree>
+      <p:nvGrpSpPr>
+        <p:cNvPr id="1" name=""/>
+        <p:cNvGrpSpPr/>
+        <p:nvPr/>
+      </p:nvGrpSpPr>
+      <p:grpSpPr/>
+      <p:sp>
+        <p:nvSpPr>
+          <p:cNvPr id="6" name="Скругленный прямоугольник 5"/>
+          <p:cNvSpPr/>
+          <p:nvPr/>
+        </p:nvSpPr>
+        <p:spPr>
+          <a:xfrm>
             <a:off x="2000885" y="346710"/>
             <a:ext cx="8190865" cy="606425"/>
           </a:xfrm>
@@ -9499,7 +10970,7 @@
 </p:sld>
 </file>
 
-<file path=ppt/slides/slide7.xml><?xml version="1.0" encoding="utf-8"?>
+<file path=ppt/slides/slide8.xml><?xml version="1.0" encoding="utf-8"?>
 <p:sld xmlns:a="http://schemas.openxmlformats.org/drawingml/2006/main" xmlns:r="http://schemas.openxmlformats.org/officeDocument/2006/relationships" xmlns:p="http://schemas.openxmlformats.org/presentationml/2006/main">
   <p:cSld>
     <p:bg>
@@ -10316,7 +11787,7 @@
 </p:sld>
 </file>
 
-<file path=ppt/slides/slide8.xml><?xml version="1.0" encoding="utf-8"?>
+<file path=ppt/slides/slide9.xml><?xml version="1.0" encoding="utf-8"?>
 <p:sld xmlns:a="http://schemas.openxmlformats.org/drawingml/2006/main" xmlns:r="http://schemas.openxmlformats.org/officeDocument/2006/relationships" xmlns:p="http://schemas.openxmlformats.org/presentationml/2006/main">
   <p:cSld>
     <p:bg>
@@ -10732,1163 +12203,6 @@
               <a:ea typeface="Calibri" panose="020F0502020204030204"/>
               <a:cs typeface="+mj-lt"/>
               <a:sym typeface="+mn-ea"/>
-            </a:endParaRPr>
-          </a:p>
-        </p:txBody>
-      </p:sp>
-    </p:spTree>
-  </p:cSld>
-  <p:clrMapOvr>
-    <a:masterClrMapping/>
-  </p:clrMapOvr>
-  <mc:AlternateContent xmlns:mc="http://schemas.openxmlformats.org/markup-compatibility/2006">
-    <mc:Choice xmlns:p14="http://schemas.microsoft.com/office/powerpoint/2010/main" Requires="p14">
-      <p:transition spd="med" p14:dur="699">
-        <p:fade/>
-      </p:transition>
-    </mc:Choice>
-    <mc:Fallback>
-      <p:transition spd="med">
-        <p:fade/>
-      </p:transition>
-    </mc:Fallback>
-  </mc:AlternateContent>
-</p:sld>
-</file>
-
-<file path=ppt/slides/slide9.xml><?xml version="1.0" encoding="utf-8"?>
-<p:sld xmlns:a="http://schemas.openxmlformats.org/drawingml/2006/main" xmlns:r="http://schemas.openxmlformats.org/officeDocument/2006/relationships" xmlns:p="http://schemas.openxmlformats.org/presentationml/2006/main">
-  <p:cSld>
-    <p:bg>
-      <p:bgPr>
-        <a:solidFill>
-          <a:schemeClr val="bg1"/>
-        </a:solidFill>
-        <a:effectLst/>
-      </p:bgPr>
-    </p:bg>
-    <p:spTree>
-      <p:nvGrpSpPr>
-        <p:cNvPr id="1" name=""/>
-        <p:cNvGrpSpPr/>
-        <p:nvPr/>
-      </p:nvGrpSpPr>
-      <p:grpSpPr/>
-      <p:cxnSp>
-        <p:nvCxnSpPr>
-          <p:cNvPr id="7" name="Прямое соединение 6"/>
-          <p:cNvCxnSpPr/>
-          <p:nvPr/>
-        </p:nvCxnSpPr>
-        <p:spPr>
-          <a:xfrm flipH="1">
-            <a:off x="6057265" y="935990"/>
-            <a:ext cx="635" cy="5953125"/>
-          </a:xfrm>
-          <a:prstGeom prst="line">
-            <a:avLst/>
-          </a:prstGeom>
-          <a:ln w="31750">
-            <a:gradFill>
-              <a:gsLst>
-                <a:gs pos="0">
-                  <a:schemeClr val="accent1">
-                    <a:hueOff val="-4200000"/>
-                  </a:schemeClr>
-                </a:gs>
-                <a:gs pos="100000">
-                  <a:schemeClr val="accent1"/>
-                </a:gs>
-              </a:gsLst>
-              <a:lin ang="21120000"/>
-            </a:gradFill>
-          </a:ln>
-        </p:spPr>
-        <p:style>
-          <a:lnRef idx="0">
-            <a:srgbClr val="FFFFFF"/>
-          </a:lnRef>
-          <a:fillRef idx="0">
-            <a:srgbClr val="FFFFFF"/>
-          </a:fillRef>
-          <a:effectRef idx="0">
-            <a:srgbClr val="FFFFFF"/>
-          </a:effectRef>
-          <a:fontRef idx="minor">
-            <a:schemeClr val="tx1"/>
-          </a:fontRef>
-        </p:style>
-      </p:cxnSp>
-      <p:sp>
-        <p:nvSpPr>
-          <p:cNvPr id="6" name="Скругленный прямоугольник 5"/>
-          <p:cNvSpPr/>
-          <p:nvPr/>
-        </p:nvSpPr>
-        <p:spPr>
-          <a:xfrm>
-            <a:off x="99695" y="346710"/>
-            <a:ext cx="12004040" cy="606425"/>
-          </a:xfrm>
-          <a:prstGeom prst="roundRect">
-            <a:avLst/>
-          </a:prstGeom>
-          <a:solidFill>
-            <a:schemeClr val="bg1"/>
-          </a:solidFill>
-          <a:ln w="28575" cmpd="sng">
-            <a:gradFill>
-              <a:gsLst>
-                <a:gs pos="0">
-                  <a:srgbClr val="5BD486"/>
-                </a:gs>
-                <a:gs pos="100000">
-                  <a:srgbClr val="5B9CD5"/>
-                </a:gs>
-              </a:gsLst>
-              <a:lin ang="4980000" scaled="1"/>
-            </a:gradFill>
-            <a:prstDash val="solid"/>
-          </a:ln>
-        </p:spPr>
-        <p:style>
-          <a:lnRef idx="2">
-            <a:schemeClr val="accent1">
-              <a:lumMod val="75000"/>
-            </a:schemeClr>
-          </a:lnRef>
-          <a:fillRef idx="1">
-            <a:schemeClr val="accent1"/>
-          </a:fillRef>
-          <a:effectRef idx="0">
-            <a:srgbClr val="FFFFFF"/>
-          </a:effectRef>
-          <a:fontRef idx="minor">
-            <a:schemeClr val="lt1"/>
-          </a:fontRef>
-        </p:style>
-        <p:txBody>
-          <a:bodyPr rtlCol="0" anchor="ctr"/>
-          <a:p>
-            <a:pPr algn="ctr"/>
-            <a:r>
-              <a:rPr lang="ru-RU" sz="2800">
-                <a:solidFill>
-                  <a:schemeClr val="tx1"/>
-                </a:solidFill>
-                <a:effectLst/>
-                <a:latin typeface="Cascadia Code" panose="020B0609020000020004" charset="0"/>
-                <a:cs typeface="Cascadia Code" panose="020B0609020000020004" charset="0"/>
-                <a:sym typeface="+mn-ea"/>
-              </a:rPr>
-              <a:t>Преимущества и недостатки</a:t>
-            </a:r>
-            <a:endParaRPr lang="ru-RU" sz="2800">
-              <a:solidFill>
-                <a:schemeClr val="tx1"/>
-              </a:solidFill>
-              <a:effectLst/>
-              <a:latin typeface="Cascadia Code" panose="020B0609020000020004" charset="0"/>
-              <a:cs typeface="Cascadia Code" panose="020B0609020000020004" charset="0"/>
-              <a:sym typeface="+mn-ea"/>
-            </a:endParaRPr>
-          </a:p>
-        </p:txBody>
-      </p:sp>
-      <p:sp>
-        <p:nvSpPr>
-          <p:cNvPr id="9" name="Текстовое поле 8"/>
-          <p:cNvSpPr txBox="1"/>
-          <p:nvPr/>
-        </p:nvSpPr>
-        <p:spPr>
-          <a:xfrm>
-            <a:off x="1117600" y="1069340"/>
-            <a:ext cx="3429635" cy="460375"/>
-          </a:xfrm>
-          <a:prstGeom prst="rect">
-            <a:avLst/>
-          </a:prstGeom>
-          <a:noFill/>
-        </p:spPr>
-        <p:txBody>
-          <a:bodyPr wrap="square" rtlCol="0">
-            <a:spAutoFit/>
-          </a:bodyPr>
-          <a:p>
-            <a:pPr algn="ctr"/>
-            <a:r>
-              <a:rPr lang="ru-RU" altLang="ru-RU" sz="2400" b="1">
-                <a:solidFill>
-                  <a:srgbClr val="5BD582"/>
-                </a:solidFill>
-                <a:latin typeface="Cascadia Code" panose="020B0609020000020004" charset="0"/>
-                <a:cs typeface="Cascadia Code" panose="020B0609020000020004" charset="0"/>
-              </a:rPr>
-              <a:t>Преимущества (+)</a:t>
-            </a:r>
-            <a:endParaRPr lang="ru-RU" altLang="ru-RU" sz="2400" b="1">
-              <a:solidFill>
-                <a:srgbClr val="5BD582"/>
-              </a:solidFill>
-              <a:latin typeface="Cascadia Code" panose="020B0609020000020004" charset="0"/>
-              <a:cs typeface="Cascadia Code" panose="020B0609020000020004" charset="0"/>
-            </a:endParaRPr>
-          </a:p>
-        </p:txBody>
-      </p:sp>
-      <p:sp>
-        <p:nvSpPr>
-          <p:cNvPr id="10" name="Текстовое поле 9"/>
-          <p:cNvSpPr txBox="1"/>
-          <p:nvPr/>
-        </p:nvSpPr>
-        <p:spPr>
-          <a:xfrm>
-            <a:off x="7440930" y="1069340"/>
-            <a:ext cx="3429635" cy="460375"/>
-          </a:xfrm>
-          <a:prstGeom prst="rect">
-            <a:avLst/>
-          </a:prstGeom>
-          <a:noFill/>
-        </p:spPr>
-        <p:txBody>
-          <a:bodyPr wrap="square" rtlCol="0">
-            <a:spAutoFit/>
-          </a:bodyPr>
-          <a:p>
-            <a:pPr algn="ctr"/>
-            <a:r>
-              <a:rPr lang="ru-RU" altLang="ru-RU" sz="2400" b="1">
-                <a:solidFill>
-                  <a:srgbClr val="5B9CD5"/>
-                </a:solidFill>
-                <a:latin typeface="Cascadia Code" panose="020B0609020000020004" charset="0"/>
-                <a:cs typeface="Cascadia Code" panose="020B0609020000020004" charset="0"/>
-              </a:rPr>
-              <a:t>Недостатки (-)</a:t>
-            </a:r>
-            <a:endParaRPr lang="ru-RU" altLang="ru-RU" sz="2400" b="1">
-              <a:solidFill>
-                <a:srgbClr val="5B9CD5"/>
-              </a:solidFill>
-              <a:latin typeface="Cascadia Code" panose="020B0609020000020004" charset="0"/>
-              <a:cs typeface="Cascadia Code" panose="020B0609020000020004" charset="0"/>
-            </a:endParaRPr>
-          </a:p>
-        </p:txBody>
-      </p:sp>
-      <p:sp>
-        <p:nvSpPr>
-          <p:cNvPr id="11" name="Текстовое поле 10"/>
-          <p:cNvSpPr txBox="1"/>
-          <p:nvPr/>
-        </p:nvSpPr>
-        <p:spPr>
-          <a:xfrm>
-            <a:off x="99695" y="1899920"/>
-            <a:ext cx="5779770" cy="829945"/>
-          </a:xfrm>
-          <a:prstGeom prst="rect">
-            <a:avLst/>
-          </a:prstGeom>
-          <a:noFill/>
-        </p:spPr>
-        <p:txBody>
-          <a:bodyPr wrap="square" rtlCol="0">
-            <a:spAutoFit/>
-          </a:bodyPr>
-          <a:p>
-            <a:pPr algn="l"/>
-            <a:r>
-              <a:rPr lang="ru-RU" altLang="ru-RU" sz="2400" b="1">
-                <a:solidFill>
-                  <a:srgbClr val="5BD582"/>
-                </a:solidFill>
-                <a:latin typeface="Cascadia Code" panose="020B0609020000020004" charset="0"/>
-                <a:cs typeface="Cascadia Code" panose="020B0609020000020004" charset="0"/>
-              </a:rPr>
-              <a:t>- </a:t>
-            </a:r>
-            <a:r>
-              <a:rPr lang="en-US" altLang="en-US" sz="2400" b="1">
-                <a:solidFill>
-                  <a:srgbClr val="5BD582"/>
-                </a:solidFill>
-                <a:latin typeface="Cascadia Code" panose="020B0609020000020004" charset="0"/>
-                <a:cs typeface="Cascadia Code" panose="020B0609020000020004" charset="0"/>
-              </a:rPr>
-              <a:t>Мультиформатный</a:t>
-            </a:r>
-            <a:r>
-              <a:rPr lang="en-US" altLang="ru-RU" sz="2400" b="1">
-                <a:solidFill>
-                  <a:srgbClr val="5BD582"/>
-                </a:solidFill>
-                <a:latin typeface="Cascadia Code" panose="020B0609020000020004" charset="0"/>
-                <a:cs typeface="Cascadia Code" panose="020B0609020000020004" charset="0"/>
-              </a:rPr>
-              <a:t> </a:t>
-            </a:r>
-            <a:r>
-              <a:rPr lang="en-US" altLang="en-US" sz="2400" b="1">
-                <a:solidFill>
-                  <a:srgbClr val="5BD582"/>
-                </a:solidFill>
-                <a:latin typeface="Cascadia Code" panose="020B0609020000020004" charset="0"/>
-                <a:cs typeface="Cascadia Code" panose="020B0609020000020004" charset="0"/>
-              </a:rPr>
-              <a:t>экспорт</a:t>
-            </a:r>
-            <a:r>
-              <a:rPr lang="en-US" altLang="ru-RU" sz="2400" b="1">
-                <a:solidFill>
-                  <a:srgbClr val="5BD582"/>
-                </a:solidFill>
-                <a:latin typeface="Cascadia Code" panose="020B0609020000020004" charset="0"/>
-                <a:cs typeface="Cascadia Code" panose="020B0609020000020004" charset="0"/>
-              </a:rPr>
-              <a:t> </a:t>
-            </a:r>
-            <a:r>
-              <a:rPr lang="ru-RU" altLang="en-US" sz="2400" b="1">
-                <a:solidFill>
-                  <a:srgbClr val="5BD582"/>
-                </a:solidFill>
-                <a:latin typeface="Cascadia Code" panose="020B0609020000020004" charset="0"/>
-                <a:cs typeface="Cascadia Code" panose="020B0609020000020004" charset="0"/>
-              </a:rPr>
-              <a:t>   </a:t>
-            </a:r>
-            <a:r>
-              <a:rPr lang="en-US" altLang="en-US" sz="2400" b="1">
-                <a:solidFill>
-                  <a:srgbClr val="5BD582"/>
-                </a:solidFill>
-                <a:latin typeface="Cascadia Code" panose="020B0609020000020004" charset="0"/>
-                <a:cs typeface="Cascadia Code" panose="020B0609020000020004" charset="0"/>
-              </a:rPr>
-              <a:t>результатов</a:t>
-            </a:r>
-            <a:r>
-              <a:rPr lang="ru-RU" altLang="en-US" sz="2400" b="1">
-                <a:solidFill>
-                  <a:srgbClr val="5BD582"/>
-                </a:solidFill>
-                <a:latin typeface="Cascadia Code" panose="020B0609020000020004" charset="0"/>
-                <a:cs typeface="Cascadia Code" panose="020B0609020000020004" charset="0"/>
-              </a:rPr>
-              <a:t> </a:t>
-            </a:r>
-            <a:r>
-              <a:rPr lang="en-US" altLang="ru-RU" sz="2400" b="1">
-                <a:solidFill>
-                  <a:srgbClr val="5BD582"/>
-                </a:solidFill>
-                <a:latin typeface="Cascadia Code" panose="020B0609020000020004" charset="0"/>
-                <a:cs typeface="Cascadia Code" panose="020B0609020000020004" charset="0"/>
-              </a:rPr>
-              <a:t>(DOCX, PDF, XLSX)</a:t>
-            </a:r>
-            <a:endParaRPr lang="en-US" altLang="ru-RU" sz="2400" b="1">
-              <a:solidFill>
-                <a:srgbClr val="5BD582"/>
-              </a:solidFill>
-              <a:latin typeface="Cascadia Code" panose="020B0609020000020004" charset="0"/>
-              <a:cs typeface="Cascadia Code" panose="020B0609020000020004" charset="0"/>
-            </a:endParaRPr>
-          </a:p>
-        </p:txBody>
-      </p:sp>
-      <p:sp>
-        <p:nvSpPr>
-          <p:cNvPr id="13" name="Текстовое поле 12"/>
-          <p:cNvSpPr txBox="1"/>
-          <p:nvPr/>
-        </p:nvSpPr>
-        <p:spPr>
-          <a:xfrm>
-            <a:off x="99695" y="2821305"/>
-            <a:ext cx="5779770" cy="829945"/>
-          </a:xfrm>
-          <a:prstGeom prst="rect">
-            <a:avLst/>
-          </a:prstGeom>
-          <a:noFill/>
-        </p:spPr>
-        <p:txBody>
-          <a:bodyPr wrap="square" rtlCol="0">
-            <a:spAutoFit/>
-          </a:bodyPr>
-          <a:p>
-            <a:pPr algn="l"/>
-            <a:r>
-              <a:rPr lang="ru-RU" altLang="ru-RU" sz="2400" b="1">
-                <a:solidFill>
-                  <a:srgbClr val="5BD582"/>
-                </a:solidFill>
-                <a:latin typeface="Cascadia Code" panose="020B0609020000020004" charset="0"/>
-                <a:cs typeface="Cascadia Code" panose="020B0609020000020004" charset="0"/>
-              </a:rPr>
-              <a:t>- </a:t>
-            </a:r>
-            <a:r>
-              <a:rPr lang="en-US" altLang="en-US" sz="2400" b="1">
-                <a:solidFill>
-                  <a:srgbClr val="5BD582"/>
-                </a:solidFill>
-                <a:latin typeface="Cascadia Code" panose="020B0609020000020004" charset="0"/>
-                <a:cs typeface="Cascadia Code" panose="020B0609020000020004" charset="0"/>
-              </a:rPr>
-              <a:t>Полная</a:t>
-            </a:r>
-            <a:r>
-              <a:rPr lang="en-US" altLang="ru-RU" sz="2400" b="1">
-                <a:solidFill>
-                  <a:srgbClr val="5BD582"/>
-                </a:solidFill>
-                <a:latin typeface="Cascadia Code" panose="020B0609020000020004" charset="0"/>
-                <a:cs typeface="Cascadia Code" panose="020B0609020000020004" charset="0"/>
-              </a:rPr>
-              <a:t> </a:t>
-            </a:r>
-            <a:r>
-              <a:rPr lang="en-US" altLang="en-US" sz="2400" b="1">
-                <a:solidFill>
-                  <a:srgbClr val="5BD582"/>
-                </a:solidFill>
-                <a:latin typeface="Cascadia Code" panose="020B0609020000020004" charset="0"/>
-                <a:cs typeface="Cascadia Code" panose="020B0609020000020004" charset="0"/>
-              </a:rPr>
-              <a:t>автоматизация</a:t>
-            </a:r>
-            <a:r>
-              <a:rPr lang="en-US" altLang="ru-RU" sz="2400" b="1">
-                <a:solidFill>
-                  <a:srgbClr val="5BD582"/>
-                </a:solidFill>
-                <a:latin typeface="Cascadia Code" panose="020B0609020000020004" charset="0"/>
-                <a:cs typeface="Cascadia Code" panose="020B0609020000020004" charset="0"/>
-              </a:rPr>
-              <a:t> </a:t>
-            </a:r>
-            <a:r>
-              <a:rPr lang="en-US" altLang="en-US" sz="2400" b="1">
-                <a:solidFill>
-                  <a:srgbClr val="5BD582"/>
-                </a:solidFill>
-                <a:latin typeface="Cascadia Code" panose="020B0609020000020004" charset="0"/>
-                <a:cs typeface="Cascadia Code" panose="020B0609020000020004" charset="0"/>
-              </a:rPr>
-              <a:t>цикла</a:t>
-            </a:r>
-            <a:r>
-              <a:rPr lang="en-US" altLang="ru-RU" sz="2400" b="1">
-                <a:solidFill>
-                  <a:srgbClr val="5BD582"/>
-                </a:solidFill>
-                <a:latin typeface="Cascadia Code" panose="020B0609020000020004" charset="0"/>
-                <a:cs typeface="Cascadia Code" panose="020B0609020000020004" charset="0"/>
-              </a:rPr>
-              <a:t> </a:t>
-            </a:r>
-            <a:r>
-              <a:rPr lang="en-US" altLang="en-US" sz="2400" b="1">
-                <a:solidFill>
-                  <a:srgbClr val="5BD582"/>
-                </a:solidFill>
-                <a:latin typeface="Cascadia Code" panose="020B0609020000020004" charset="0"/>
-                <a:cs typeface="Cascadia Code" panose="020B0609020000020004" charset="0"/>
-              </a:rPr>
-              <a:t>тестирования</a:t>
-            </a:r>
-            <a:endParaRPr lang="en-US" altLang="en-US" sz="2400" b="1">
-              <a:solidFill>
-                <a:srgbClr val="5BD582"/>
-              </a:solidFill>
-              <a:latin typeface="Cascadia Code" panose="020B0609020000020004" charset="0"/>
-              <a:cs typeface="Cascadia Code" panose="020B0609020000020004" charset="0"/>
-            </a:endParaRPr>
-          </a:p>
-        </p:txBody>
-      </p:sp>
-      <p:sp>
-        <p:nvSpPr>
-          <p:cNvPr id="14" name="Текстовое поле 13"/>
-          <p:cNvSpPr txBox="1"/>
-          <p:nvPr/>
-        </p:nvSpPr>
-        <p:spPr>
-          <a:xfrm>
-            <a:off x="99695" y="3742690"/>
-            <a:ext cx="5779770" cy="829945"/>
-          </a:xfrm>
-          <a:prstGeom prst="rect">
-            <a:avLst/>
-          </a:prstGeom>
-          <a:noFill/>
-        </p:spPr>
-        <p:txBody>
-          <a:bodyPr wrap="square" rtlCol="0">
-            <a:spAutoFit/>
-          </a:bodyPr>
-          <a:p>
-            <a:pPr algn="l"/>
-            <a:r>
-              <a:rPr lang="ru-RU" altLang="ru-RU" sz="2400" b="1">
-                <a:solidFill>
-                  <a:srgbClr val="5BD582"/>
-                </a:solidFill>
-                <a:latin typeface="Cascadia Code" panose="020B0609020000020004" charset="0"/>
-                <a:cs typeface="Cascadia Code" panose="020B0609020000020004" charset="0"/>
-              </a:rPr>
-              <a:t>- </a:t>
-            </a:r>
-            <a:r>
-              <a:rPr lang="en-US" altLang="en-US" sz="2400" b="1">
-                <a:solidFill>
-                  <a:srgbClr val="5BD582"/>
-                </a:solidFill>
-                <a:latin typeface="Cascadia Code" panose="020B0609020000020004" charset="0"/>
-                <a:cs typeface="Cascadia Code" panose="020B0609020000020004" charset="0"/>
-              </a:rPr>
-              <a:t>Детальная</a:t>
-            </a:r>
-            <a:r>
-              <a:rPr lang="en-US" altLang="ru-RU" sz="2400" b="1">
-                <a:solidFill>
-                  <a:srgbClr val="5BD582"/>
-                </a:solidFill>
-                <a:latin typeface="Cascadia Code" panose="020B0609020000020004" charset="0"/>
-                <a:cs typeface="Cascadia Code" panose="020B0609020000020004" charset="0"/>
-              </a:rPr>
-              <a:t> </a:t>
-            </a:r>
-            <a:r>
-              <a:rPr lang="en-US" altLang="en-US" sz="2400" b="1">
-                <a:solidFill>
-                  <a:srgbClr val="5BD582"/>
-                </a:solidFill>
-                <a:latin typeface="Cascadia Code" panose="020B0609020000020004" charset="0"/>
-                <a:cs typeface="Cascadia Code" panose="020B0609020000020004" charset="0"/>
-              </a:rPr>
-              <a:t>статистика</a:t>
-            </a:r>
-            <a:r>
-              <a:rPr lang="en-US" altLang="ru-RU" sz="2400" b="1">
-                <a:solidFill>
-                  <a:srgbClr val="5BD582"/>
-                </a:solidFill>
-                <a:latin typeface="Cascadia Code" panose="020B0609020000020004" charset="0"/>
-                <a:cs typeface="Cascadia Code" panose="020B0609020000020004" charset="0"/>
-              </a:rPr>
-              <a:t> </a:t>
-            </a:r>
-            <a:r>
-              <a:rPr lang="en-US" altLang="en-US" sz="2400" b="1">
-                <a:solidFill>
-                  <a:srgbClr val="5BD582"/>
-                </a:solidFill>
-                <a:latin typeface="Cascadia Code" panose="020B0609020000020004" charset="0"/>
-                <a:cs typeface="Cascadia Code" panose="020B0609020000020004" charset="0"/>
-              </a:rPr>
-              <a:t>и</a:t>
-            </a:r>
-            <a:r>
-              <a:rPr lang="en-US" altLang="ru-RU" sz="2400" b="1">
-                <a:solidFill>
-                  <a:srgbClr val="5BD582"/>
-                </a:solidFill>
-                <a:latin typeface="Cascadia Code" panose="020B0609020000020004" charset="0"/>
-                <a:cs typeface="Cascadia Code" panose="020B0609020000020004" charset="0"/>
-              </a:rPr>
-              <a:t> </a:t>
-            </a:r>
-            <a:r>
-              <a:rPr lang="en-US" altLang="en-US" sz="2400" b="1">
-                <a:solidFill>
-                  <a:srgbClr val="5BD582"/>
-                </a:solidFill>
-                <a:latin typeface="Cascadia Code" panose="020B0609020000020004" charset="0"/>
-                <a:cs typeface="Cascadia Code" panose="020B0609020000020004" charset="0"/>
-              </a:rPr>
-              <a:t>аналитика</a:t>
-            </a:r>
-            <a:r>
-              <a:rPr lang="en-US" altLang="ru-RU" sz="2400" b="1">
-                <a:solidFill>
-                  <a:srgbClr val="5BD582"/>
-                </a:solidFill>
-                <a:latin typeface="Cascadia Code" panose="020B0609020000020004" charset="0"/>
-                <a:cs typeface="Cascadia Code" panose="020B0609020000020004" charset="0"/>
-              </a:rPr>
-              <a:t> </a:t>
-            </a:r>
-            <a:r>
-              <a:rPr lang="en-US" altLang="en-US" sz="2400" b="1">
-                <a:solidFill>
-                  <a:srgbClr val="5BD582"/>
-                </a:solidFill>
-                <a:latin typeface="Cascadia Code" panose="020B0609020000020004" charset="0"/>
-                <a:cs typeface="Cascadia Code" panose="020B0609020000020004" charset="0"/>
-              </a:rPr>
-              <a:t>результатов</a:t>
-            </a:r>
-            <a:endParaRPr lang="en-US" altLang="en-US" sz="2400" b="1">
-              <a:solidFill>
-                <a:srgbClr val="5BD582"/>
-              </a:solidFill>
-              <a:latin typeface="Cascadia Code" panose="020B0609020000020004" charset="0"/>
-              <a:cs typeface="Cascadia Code" panose="020B0609020000020004" charset="0"/>
-            </a:endParaRPr>
-          </a:p>
-        </p:txBody>
-      </p:sp>
-      <p:sp>
-        <p:nvSpPr>
-          <p:cNvPr id="16" name="Текстовое поле 15"/>
-          <p:cNvSpPr txBox="1"/>
-          <p:nvPr/>
-        </p:nvSpPr>
-        <p:spPr>
-          <a:xfrm>
-            <a:off x="99695" y="4664075"/>
-            <a:ext cx="5702935" cy="460375"/>
-          </a:xfrm>
-          <a:prstGeom prst="rect">
-            <a:avLst/>
-          </a:prstGeom>
-          <a:noFill/>
-        </p:spPr>
-        <p:txBody>
-          <a:bodyPr wrap="square" rtlCol="0">
-            <a:spAutoFit/>
-          </a:bodyPr>
-          <a:p>
-            <a:pPr algn="l"/>
-            <a:r>
-              <a:rPr lang="ru-RU" altLang="ru-RU" sz="2400" b="1">
-                <a:solidFill>
-                  <a:srgbClr val="5BD582"/>
-                </a:solidFill>
-                <a:latin typeface="Cascadia Code" panose="020B0609020000020004" charset="0"/>
-                <a:cs typeface="Cascadia Code" panose="020B0609020000020004" charset="0"/>
-              </a:rPr>
-              <a:t>- </a:t>
-            </a:r>
-            <a:r>
-              <a:rPr lang="en-US" altLang="en-US" sz="2400" b="1">
-                <a:solidFill>
-                  <a:srgbClr val="5BD582"/>
-                </a:solidFill>
-                <a:latin typeface="Cascadia Code" panose="020B0609020000020004" charset="0"/>
-                <a:cs typeface="Cascadia Code" panose="020B0609020000020004" charset="0"/>
-              </a:rPr>
-              <a:t>Готовые</a:t>
-            </a:r>
-            <a:r>
-              <a:rPr lang="en-US" altLang="ru-RU" sz="2400" b="1">
-                <a:solidFill>
-                  <a:srgbClr val="5BD582"/>
-                </a:solidFill>
-                <a:latin typeface="Cascadia Code" panose="020B0609020000020004" charset="0"/>
-                <a:cs typeface="Cascadia Code" panose="020B0609020000020004" charset="0"/>
-              </a:rPr>
-              <a:t> </a:t>
-            </a:r>
-            <a:r>
-              <a:rPr lang="en-US" altLang="en-US" sz="2400" b="1">
-                <a:solidFill>
-                  <a:srgbClr val="5BD582"/>
-                </a:solidFill>
-                <a:latin typeface="Cascadia Code" panose="020B0609020000020004" charset="0"/>
-                <a:cs typeface="Cascadia Code" panose="020B0609020000020004" charset="0"/>
-              </a:rPr>
-              <a:t>шаблоны</a:t>
-            </a:r>
-            <a:r>
-              <a:rPr lang="en-US" altLang="ru-RU" sz="2400" b="1">
-                <a:solidFill>
-                  <a:srgbClr val="5BD582"/>
-                </a:solidFill>
-                <a:latin typeface="Cascadia Code" panose="020B0609020000020004" charset="0"/>
-                <a:cs typeface="Cascadia Code" panose="020B0609020000020004" charset="0"/>
-              </a:rPr>
-              <a:t> </a:t>
-            </a:r>
-            <a:r>
-              <a:rPr lang="en-US" altLang="en-US" sz="2400" b="1">
-                <a:solidFill>
-                  <a:srgbClr val="5BD582"/>
-                </a:solidFill>
-                <a:latin typeface="Cascadia Code" panose="020B0609020000020004" charset="0"/>
-                <a:cs typeface="Cascadia Code" panose="020B0609020000020004" charset="0"/>
-              </a:rPr>
-              <a:t>сертификатов</a:t>
-            </a:r>
-            <a:endParaRPr lang="en-US" altLang="en-US" sz="2400" b="1">
-              <a:solidFill>
-                <a:srgbClr val="5BD582"/>
-              </a:solidFill>
-              <a:latin typeface="Cascadia Code" panose="020B0609020000020004" charset="0"/>
-              <a:cs typeface="Cascadia Code" panose="020B0609020000020004" charset="0"/>
-            </a:endParaRPr>
-          </a:p>
-        </p:txBody>
-      </p:sp>
-      <p:sp>
-        <p:nvSpPr>
-          <p:cNvPr id="20" name="Текстовое поле 19"/>
-          <p:cNvSpPr txBox="1"/>
-          <p:nvPr/>
-        </p:nvSpPr>
-        <p:spPr>
-          <a:xfrm>
-            <a:off x="6236335" y="1793240"/>
-            <a:ext cx="5867400" cy="829945"/>
-          </a:xfrm>
-          <a:prstGeom prst="rect">
-            <a:avLst/>
-          </a:prstGeom>
-          <a:noFill/>
-        </p:spPr>
-        <p:txBody>
-          <a:bodyPr wrap="square" rtlCol="0">
-            <a:spAutoFit/>
-          </a:bodyPr>
-          <a:p>
-            <a:pPr algn="l"/>
-            <a:r>
-              <a:rPr lang="ru-RU" altLang="en-US" sz="2400" b="1">
-                <a:solidFill>
-                  <a:srgbClr val="5B9CD5"/>
-                </a:solidFill>
-                <a:latin typeface="Cascadia Code" panose="020B0609020000020004" charset="0"/>
-                <a:cs typeface="Cascadia Code" panose="020B0609020000020004" charset="0"/>
-              </a:rPr>
-              <a:t>- </a:t>
-            </a:r>
-            <a:r>
-              <a:rPr lang="en-US" altLang="en-US" sz="2400" b="1">
-                <a:solidFill>
-                  <a:srgbClr val="5B9CD5"/>
-                </a:solidFill>
-                <a:latin typeface="Cascadia Code" panose="020B0609020000020004" charset="0"/>
-                <a:cs typeface="Cascadia Code" panose="020B0609020000020004" charset="0"/>
-              </a:rPr>
-              <a:t>Только</a:t>
-            </a:r>
-            <a:r>
-              <a:rPr lang="en-US" altLang="ru-RU" sz="2400" b="1">
-                <a:solidFill>
-                  <a:srgbClr val="5B9CD5"/>
-                </a:solidFill>
-                <a:latin typeface="Cascadia Code" panose="020B0609020000020004" charset="0"/>
-                <a:cs typeface="Cascadia Code" panose="020B0609020000020004" charset="0"/>
-              </a:rPr>
-              <a:t> </a:t>
-            </a:r>
-            <a:r>
-              <a:rPr lang="en-US" altLang="en-US" sz="2400" b="1">
-                <a:solidFill>
-                  <a:srgbClr val="5B9CD5"/>
-                </a:solidFill>
-                <a:latin typeface="Cascadia Code" panose="020B0609020000020004" charset="0"/>
-                <a:cs typeface="Cascadia Code" panose="020B0609020000020004" charset="0"/>
-              </a:rPr>
-              <a:t>один</a:t>
-            </a:r>
-            <a:r>
-              <a:rPr lang="en-US" altLang="ru-RU" sz="2400" b="1">
-                <a:solidFill>
-                  <a:srgbClr val="5B9CD5"/>
-                </a:solidFill>
-                <a:latin typeface="Cascadia Code" panose="020B0609020000020004" charset="0"/>
-                <a:cs typeface="Cascadia Code" panose="020B0609020000020004" charset="0"/>
-              </a:rPr>
-              <a:t> </a:t>
-            </a:r>
-            <a:r>
-              <a:rPr lang="en-US" altLang="en-US" sz="2400" b="1">
-                <a:solidFill>
-                  <a:srgbClr val="5B9CD5"/>
-                </a:solidFill>
-                <a:latin typeface="Cascadia Code" panose="020B0609020000020004" charset="0"/>
-                <a:cs typeface="Cascadia Code" panose="020B0609020000020004" charset="0"/>
-              </a:rPr>
-              <a:t>тип</a:t>
-            </a:r>
-            <a:r>
-              <a:rPr lang="en-US" altLang="ru-RU" sz="2400" b="1">
-                <a:solidFill>
-                  <a:srgbClr val="5B9CD5"/>
-                </a:solidFill>
-                <a:latin typeface="Cascadia Code" panose="020B0609020000020004" charset="0"/>
-                <a:cs typeface="Cascadia Code" panose="020B0609020000020004" charset="0"/>
-              </a:rPr>
-              <a:t> </a:t>
-            </a:r>
-            <a:r>
-              <a:rPr lang="en-US" altLang="en-US" sz="2400" b="1">
-                <a:solidFill>
-                  <a:srgbClr val="5B9CD5"/>
-                </a:solidFill>
-                <a:latin typeface="Cascadia Code" panose="020B0609020000020004" charset="0"/>
-                <a:cs typeface="Cascadia Code" panose="020B0609020000020004" charset="0"/>
-              </a:rPr>
-              <a:t>вопросов</a:t>
-            </a:r>
-            <a:r>
-              <a:rPr lang="en-US" altLang="ru-RU" sz="2400" b="1">
-                <a:solidFill>
-                  <a:srgbClr val="5B9CD5"/>
-                </a:solidFill>
-                <a:latin typeface="Cascadia Code" panose="020B0609020000020004" charset="0"/>
-                <a:cs typeface="Cascadia Code" panose="020B0609020000020004" charset="0"/>
-              </a:rPr>
-              <a:t> (</a:t>
-            </a:r>
-            <a:r>
-              <a:rPr lang="en-US" altLang="en-US" sz="2400" b="1">
-                <a:solidFill>
-                  <a:srgbClr val="5B9CD5"/>
-                </a:solidFill>
-                <a:latin typeface="Cascadia Code" panose="020B0609020000020004" charset="0"/>
-                <a:cs typeface="Cascadia Code" panose="020B0609020000020004" charset="0"/>
-              </a:rPr>
-              <a:t>выбор</a:t>
-            </a:r>
-            <a:r>
-              <a:rPr lang="en-US" altLang="ru-RU" sz="2400" b="1">
-                <a:solidFill>
-                  <a:srgbClr val="5B9CD5"/>
-                </a:solidFill>
-                <a:latin typeface="Cascadia Code" panose="020B0609020000020004" charset="0"/>
-                <a:cs typeface="Cascadia Code" panose="020B0609020000020004" charset="0"/>
-              </a:rPr>
-              <a:t> </a:t>
-            </a:r>
-            <a:r>
-              <a:rPr lang="en-US" altLang="en-US" sz="2400" b="1">
-                <a:solidFill>
-                  <a:srgbClr val="5B9CD5"/>
-                </a:solidFill>
-                <a:latin typeface="Cascadia Code" panose="020B0609020000020004" charset="0"/>
-                <a:cs typeface="Cascadia Code" panose="020B0609020000020004" charset="0"/>
-              </a:rPr>
-              <a:t>одного</a:t>
-            </a:r>
-            <a:r>
-              <a:rPr lang="en-US" altLang="ru-RU" sz="2400" b="1">
-                <a:solidFill>
-                  <a:srgbClr val="5B9CD5"/>
-                </a:solidFill>
-                <a:latin typeface="Cascadia Code" panose="020B0609020000020004" charset="0"/>
-                <a:cs typeface="Cascadia Code" panose="020B0609020000020004" charset="0"/>
-              </a:rPr>
-              <a:t> </a:t>
-            </a:r>
-            <a:r>
-              <a:rPr lang="en-US" altLang="en-US" sz="2400" b="1">
-                <a:solidFill>
-                  <a:srgbClr val="5B9CD5"/>
-                </a:solidFill>
-                <a:latin typeface="Cascadia Code" panose="020B0609020000020004" charset="0"/>
-                <a:cs typeface="Cascadia Code" panose="020B0609020000020004" charset="0"/>
-              </a:rPr>
-              <a:t>варианта</a:t>
-            </a:r>
-            <a:r>
-              <a:rPr lang="en-US" altLang="ru-RU" sz="2400" b="1">
-                <a:solidFill>
-                  <a:srgbClr val="5B9CD5"/>
-                </a:solidFill>
-                <a:latin typeface="Cascadia Code" panose="020B0609020000020004" charset="0"/>
-                <a:cs typeface="Cascadia Code" panose="020B0609020000020004" charset="0"/>
-              </a:rPr>
-              <a:t>)</a:t>
-            </a:r>
-            <a:r>
-              <a:rPr lang="en-US" altLang="ru-RU" sz="2400" b="1">
-                <a:solidFill>
-                  <a:srgbClr val="5B9CD5"/>
-                </a:solidFill>
-                <a:latin typeface="Cascadia Code" panose="020B0609020000020004" charset="0"/>
-                <a:cs typeface="Cascadia Code" panose="020B0609020000020004" charset="0"/>
-              </a:rPr>
-              <a:t> </a:t>
-            </a:r>
-            <a:endParaRPr lang="en-US" altLang="ru-RU" sz="2400" b="1">
-              <a:solidFill>
-                <a:srgbClr val="5B9CD5"/>
-              </a:solidFill>
-              <a:latin typeface="Cascadia Code" panose="020B0609020000020004" charset="0"/>
-              <a:cs typeface="Cascadia Code" panose="020B0609020000020004" charset="0"/>
-            </a:endParaRPr>
-          </a:p>
-        </p:txBody>
-      </p:sp>
-      <p:sp>
-        <p:nvSpPr>
-          <p:cNvPr id="23" name="Текстовое поле 22"/>
-          <p:cNvSpPr txBox="1"/>
-          <p:nvPr/>
-        </p:nvSpPr>
-        <p:spPr>
-          <a:xfrm>
-            <a:off x="6312535" y="2823845"/>
-            <a:ext cx="5791200" cy="829945"/>
-          </a:xfrm>
-          <a:prstGeom prst="rect">
-            <a:avLst/>
-          </a:prstGeom>
-          <a:noFill/>
-        </p:spPr>
-        <p:txBody>
-          <a:bodyPr wrap="square" rtlCol="0">
-            <a:spAutoFit/>
-          </a:bodyPr>
-          <a:p>
-            <a:pPr algn="l"/>
-            <a:r>
-              <a:rPr lang="ru-RU" altLang="en-US" sz="2400" b="1">
-                <a:solidFill>
-                  <a:srgbClr val="5B9CD5"/>
-                </a:solidFill>
-                <a:latin typeface="Cascadia Code" panose="020B0609020000020004" charset="0"/>
-                <a:cs typeface="Cascadia Code" panose="020B0609020000020004" charset="0"/>
-              </a:rPr>
-              <a:t>- </a:t>
-            </a:r>
-            <a:r>
-              <a:rPr lang="en-US" altLang="en-US" sz="2400" b="1">
-                <a:solidFill>
-                  <a:srgbClr val="5B9CD5"/>
-                </a:solidFill>
-                <a:latin typeface="Cascadia Code" panose="020B0609020000020004" charset="0"/>
-                <a:cs typeface="Cascadia Code" panose="020B0609020000020004" charset="0"/>
-              </a:rPr>
-              <a:t>Нет</a:t>
-            </a:r>
-            <a:r>
-              <a:rPr lang="en-US" altLang="ru-RU" sz="2400" b="1">
-                <a:solidFill>
-                  <a:srgbClr val="5B9CD5"/>
-                </a:solidFill>
-                <a:latin typeface="Cascadia Code" panose="020B0609020000020004" charset="0"/>
-                <a:cs typeface="Cascadia Code" panose="020B0609020000020004" charset="0"/>
-              </a:rPr>
-              <a:t> </a:t>
-            </a:r>
-            <a:r>
-              <a:rPr lang="en-US" altLang="en-US" sz="2400" b="1">
-                <a:solidFill>
-                  <a:srgbClr val="5B9CD5"/>
-                </a:solidFill>
-                <a:latin typeface="Cascadia Code" panose="020B0609020000020004" charset="0"/>
-                <a:cs typeface="Cascadia Code" panose="020B0609020000020004" charset="0"/>
-              </a:rPr>
-              <a:t>возможности</a:t>
-            </a:r>
-            <a:r>
-              <a:rPr lang="en-US" altLang="ru-RU" sz="2400" b="1">
-                <a:solidFill>
-                  <a:srgbClr val="5B9CD5"/>
-                </a:solidFill>
-                <a:latin typeface="Cascadia Code" panose="020B0609020000020004" charset="0"/>
-                <a:cs typeface="Cascadia Code" panose="020B0609020000020004" charset="0"/>
-              </a:rPr>
-              <a:t> </a:t>
-            </a:r>
-            <a:r>
-              <a:rPr lang="en-US" altLang="en-US" sz="2400" b="1">
-                <a:solidFill>
-                  <a:srgbClr val="5B9CD5"/>
-                </a:solidFill>
-                <a:latin typeface="Cascadia Code" panose="020B0609020000020004" charset="0"/>
-                <a:cs typeface="Cascadia Code" panose="020B0609020000020004" charset="0"/>
-              </a:rPr>
-              <a:t>вернуться</a:t>
-            </a:r>
-            <a:r>
-              <a:rPr lang="en-US" altLang="ru-RU" sz="2400" b="1">
-                <a:solidFill>
-                  <a:srgbClr val="5B9CD5"/>
-                </a:solidFill>
-                <a:latin typeface="Cascadia Code" panose="020B0609020000020004" charset="0"/>
-                <a:cs typeface="Cascadia Code" panose="020B0609020000020004" charset="0"/>
-              </a:rPr>
-              <a:t> </a:t>
-            </a:r>
-            <a:r>
-              <a:rPr lang="en-US" altLang="en-US" sz="2400" b="1">
-                <a:solidFill>
-                  <a:srgbClr val="5B9CD5"/>
-                </a:solidFill>
-                <a:latin typeface="Cascadia Code" panose="020B0609020000020004" charset="0"/>
-                <a:cs typeface="Cascadia Code" panose="020B0609020000020004" charset="0"/>
-              </a:rPr>
-              <a:t>к</a:t>
-            </a:r>
-            <a:r>
-              <a:rPr lang="en-US" altLang="ru-RU" sz="2400" b="1">
-                <a:solidFill>
-                  <a:srgbClr val="5B9CD5"/>
-                </a:solidFill>
-                <a:latin typeface="Cascadia Code" panose="020B0609020000020004" charset="0"/>
-                <a:cs typeface="Cascadia Code" panose="020B0609020000020004" charset="0"/>
-              </a:rPr>
-              <a:t> </a:t>
-            </a:r>
-            <a:r>
-              <a:rPr lang="en-US" altLang="en-US" sz="2400" b="1">
-                <a:solidFill>
-                  <a:srgbClr val="5B9CD5"/>
-                </a:solidFill>
-                <a:latin typeface="Cascadia Code" panose="020B0609020000020004" charset="0"/>
-                <a:cs typeface="Cascadia Code" panose="020B0609020000020004" charset="0"/>
-              </a:rPr>
-              <a:t>предыдущему</a:t>
-            </a:r>
-            <a:r>
-              <a:rPr lang="en-US" altLang="ru-RU" sz="2400" b="1">
-                <a:solidFill>
-                  <a:srgbClr val="5B9CD5"/>
-                </a:solidFill>
-                <a:latin typeface="Cascadia Code" panose="020B0609020000020004" charset="0"/>
-                <a:cs typeface="Cascadia Code" panose="020B0609020000020004" charset="0"/>
-              </a:rPr>
-              <a:t> </a:t>
-            </a:r>
-            <a:r>
-              <a:rPr lang="en-US" altLang="en-US" sz="2400" b="1">
-                <a:solidFill>
-                  <a:srgbClr val="5B9CD5"/>
-                </a:solidFill>
-                <a:latin typeface="Cascadia Code" panose="020B0609020000020004" charset="0"/>
-                <a:cs typeface="Cascadia Code" panose="020B0609020000020004" charset="0"/>
-              </a:rPr>
-              <a:t>вопросу</a:t>
-            </a:r>
-            <a:endParaRPr lang="en-US" altLang="en-US" sz="2400" b="1">
-              <a:solidFill>
-                <a:srgbClr val="5B9CD5"/>
-              </a:solidFill>
-              <a:latin typeface="Cascadia Code" panose="020B0609020000020004" charset="0"/>
-              <a:cs typeface="Cascadia Code" panose="020B0609020000020004" charset="0"/>
-            </a:endParaRPr>
-          </a:p>
-        </p:txBody>
-      </p:sp>
-      <p:sp>
-        <p:nvSpPr>
-          <p:cNvPr id="26" name="Текстовое поле 25"/>
-          <p:cNvSpPr txBox="1"/>
-          <p:nvPr/>
-        </p:nvSpPr>
-        <p:spPr>
-          <a:xfrm>
-            <a:off x="6312535" y="3917950"/>
-            <a:ext cx="5791200" cy="829945"/>
-          </a:xfrm>
-          <a:prstGeom prst="rect">
-            <a:avLst/>
-          </a:prstGeom>
-          <a:noFill/>
-        </p:spPr>
-        <p:txBody>
-          <a:bodyPr wrap="square" rtlCol="0">
-            <a:spAutoFit/>
-          </a:bodyPr>
-          <a:p>
-            <a:pPr algn="l"/>
-            <a:r>
-              <a:rPr lang="ru-RU" altLang="en-US" sz="2400" b="1">
-                <a:solidFill>
-                  <a:srgbClr val="5B9CD5"/>
-                </a:solidFill>
-                <a:latin typeface="Cascadia Code" panose="020B0609020000020004" charset="0"/>
-                <a:cs typeface="Cascadia Code" panose="020B0609020000020004" charset="0"/>
-              </a:rPr>
-              <a:t>- </a:t>
-            </a:r>
-            <a:r>
-              <a:rPr lang="en-US" altLang="en-US" sz="2400" b="1">
-                <a:solidFill>
-                  <a:srgbClr val="5B9CD5"/>
-                </a:solidFill>
-                <a:latin typeface="Cascadia Code" panose="020B0609020000020004" charset="0"/>
-                <a:cs typeface="Cascadia Code" panose="020B0609020000020004" charset="0"/>
-              </a:rPr>
-              <a:t>Ограниченный</a:t>
-            </a:r>
-            <a:r>
-              <a:rPr lang="en-US" altLang="ru-RU" sz="2400" b="1">
-                <a:solidFill>
-                  <a:srgbClr val="5B9CD5"/>
-                </a:solidFill>
-                <a:latin typeface="Cascadia Code" panose="020B0609020000020004" charset="0"/>
-                <a:cs typeface="Cascadia Code" panose="020B0609020000020004" charset="0"/>
-              </a:rPr>
-              <a:t> </a:t>
-            </a:r>
-            <a:r>
-              <a:rPr lang="en-US" altLang="en-US" sz="2400" b="1">
-                <a:solidFill>
-                  <a:srgbClr val="5B9CD5"/>
-                </a:solidFill>
-                <a:latin typeface="Cascadia Code" panose="020B0609020000020004" charset="0"/>
-                <a:cs typeface="Cascadia Code" panose="020B0609020000020004" charset="0"/>
-              </a:rPr>
-              <a:t>функционал</a:t>
-            </a:r>
-            <a:r>
-              <a:rPr lang="en-US" altLang="ru-RU" sz="2400" b="1">
-                <a:solidFill>
-                  <a:srgbClr val="5B9CD5"/>
-                </a:solidFill>
-                <a:latin typeface="Cascadia Code" panose="020B0609020000020004" charset="0"/>
-                <a:cs typeface="Cascadia Code" panose="020B0609020000020004" charset="0"/>
-              </a:rPr>
-              <a:t> </a:t>
-            </a:r>
-            <a:r>
-              <a:rPr lang="en-US" altLang="en-US" sz="2400" b="1">
-                <a:solidFill>
-                  <a:srgbClr val="5B9CD5"/>
-                </a:solidFill>
-                <a:latin typeface="Cascadia Code" panose="020B0609020000020004" charset="0"/>
-                <a:cs typeface="Cascadia Code" panose="020B0609020000020004" charset="0"/>
-              </a:rPr>
-              <a:t>мобильной</a:t>
-            </a:r>
-            <a:r>
-              <a:rPr lang="en-US" altLang="ru-RU" sz="2400" b="1">
-                <a:solidFill>
-                  <a:srgbClr val="5B9CD5"/>
-                </a:solidFill>
-                <a:latin typeface="Cascadia Code" panose="020B0609020000020004" charset="0"/>
-                <a:cs typeface="Cascadia Code" panose="020B0609020000020004" charset="0"/>
-              </a:rPr>
-              <a:t> </a:t>
-            </a:r>
-            <a:r>
-              <a:rPr lang="en-US" altLang="en-US" sz="2400" b="1">
-                <a:solidFill>
-                  <a:srgbClr val="5B9CD5"/>
-                </a:solidFill>
-                <a:latin typeface="Cascadia Code" panose="020B0609020000020004" charset="0"/>
-                <a:cs typeface="Cascadia Code" panose="020B0609020000020004" charset="0"/>
-              </a:rPr>
-              <a:t>версии</a:t>
-            </a:r>
-            <a:endParaRPr lang="en-US" altLang="en-US" sz="2400" b="1">
-              <a:solidFill>
-                <a:srgbClr val="5B9CD5"/>
-              </a:solidFill>
-              <a:latin typeface="Cascadia Code" panose="020B0609020000020004" charset="0"/>
-              <a:cs typeface="Cascadia Code" panose="020B0609020000020004" charset="0"/>
             </a:endParaRPr>
           </a:p>
         </p:txBody>
